--- a/Cipher_Breach_Presentation.pptx
+++ b/Cipher_Breach_Presentation.pptx
@@ -1652,9 +1652,35 @@
             <a:off x="6663204" y="1135890"/>
             <a:ext cx="4943580" cy="3799835"/>
           </a:xfrm>
-          <a:prstGeom prst="rect">
-            <a:avLst/>
-          </a:prstGeom>
+          <a:prstGeom prst="roundRect">
+            <a:avLst>
+              <a:gd name="adj" fmla="val 4167"/>
+            </a:avLst>
+          </a:prstGeom>
+          <a:solidFill>
+            <a:srgbClr val="FFFFFF"/>
+          </a:solidFill>
+          <a:ln w="76200" cap="sq">
+            <a:solidFill>
+              <a:srgbClr val="292929"/>
+            </a:solidFill>
+            <a:miter lim="800000"/>
+          </a:ln>
+          <a:effectLst>
+            <a:reflection blurRad="12700" stA="28000" endPos="28000" dist="5000" dir="5400000" sy="-100000" algn="bl" rotWithShape="0"/>
+          </a:effectLst>
+          <a:scene3d>
+            <a:camera prst="orthographicFront"/>
+            <a:lightRig rig="threePt" dir="t">
+              <a:rot lat="0" lon="0" rev="2700000"/>
+            </a:lightRig>
+          </a:scene3d>
+          <a:sp3d>
+            <a:bevelT h="38100"/>
+            <a:contourClr>
+              <a:srgbClr val="C0C0C0"/>
+            </a:contourClr>
+          </a:sp3d>
         </p:spPr>
       </p:pic>
       <p:sp>
@@ -2580,7 +2606,7 @@
         <p:spPr>
           <a:xfrm>
             <a:off x="594360" y="2359152"/>
-            <a:ext cx="3840480" cy="164592"/>
+            <a:ext cx="3840480" cy="274320"/>
           </a:xfrm>
           <a:prstGeom prst="rect">
             <a:avLst/>
@@ -2603,7 +2629,15 @@
               </a:rPr>
               <a:t>Supervised by Dr. Abdullah Albuali</a:t>
             </a:r>
-            <a:endParaRPr lang="en-US" sz="1050" dirty="0"/>
+          </a:p>
+          <a:p>
+            <a:pPr marL="0" indent="0">
+              <a:buNone/>
+            </a:pPr>
+            <a:r>
+              <a:rPr lang="en-US" sz="1050" dirty="0"/>
+              <a:t>Date: May 2026</a:t>
+            </a:r>
           </a:p>
         </p:txBody>
       </p:sp>
@@ -3311,9 +3345,33 @@
             <a:off x="7157139" y="1902514"/>
             <a:ext cx="4455741" cy="2550614"/>
           </a:xfrm>
-          <a:prstGeom prst="rect">
-            <a:avLst/>
-          </a:prstGeom>
+          <a:prstGeom prst="roundRect">
+            <a:avLst>
+              <a:gd name="adj" fmla="val 16667"/>
+            </a:avLst>
+          </a:prstGeom>
+          <a:ln>
+            <a:noFill/>
+          </a:ln>
+          <a:effectLst>
+            <a:outerShdw blurRad="152400" dist="12000" dir="900000" sy="98000" kx="110000" ky="200000" algn="tl" rotWithShape="0">
+              <a:srgbClr val="000000">
+                <a:alpha val="30000"/>
+              </a:srgbClr>
+            </a:outerShdw>
+          </a:effectLst>
+          <a:scene3d>
+            <a:camera prst="perspectiveRelaxed">
+              <a:rot lat="19800000" lon="1200000" rev="20820000"/>
+            </a:camera>
+            <a:lightRig rig="threePt" dir="t"/>
+          </a:scene3d>
+          <a:sp3d contourW="6350" prstMaterial="matte">
+            <a:bevelT w="101600" h="101600"/>
+            <a:contourClr>
+              <a:srgbClr val="969696"/>
+            </a:contourClr>
+          </a:sp3d>
         </p:spPr>
       </p:pic>
     </p:spTree>
@@ -3491,11 +3549,17 @@
             </a:avLst>
           </a:prstGeom>
           <a:solidFill>
-            <a:srgbClr val="FFF8F8"/>
+            <a:schemeClr val="accent5">
+              <a:lumMod val="20000"/>
+              <a:lumOff val="80000"/>
+            </a:schemeClr>
           </a:solidFill>
           <a:ln w="12700">
             <a:solidFill>
-              <a:srgbClr val="F4D7DB"/>
+              <a:schemeClr val="accent5">
+                <a:lumMod val="40000"/>
+                <a:lumOff val="60000"/>
+              </a:schemeClr>
             </a:solidFill>
             <a:prstDash val="solid"/>
           </a:ln>
@@ -3538,7 +3602,7 @@
                   <a:srgbClr val="53657A"/>
                 </a:solidFill>
               </a:rPr>
-              <a:t>HEALTH</a:t>
+              <a:t>Daemon Types</a:t>
             </a:r>
             <a:endParaRPr lang="en-US" sz="850" dirty="0"/>
           </a:p>
@@ -3571,12 +3635,48 @@
             <a:r>
               <a:rPr lang="en-US" sz="1350" b="1" dirty="0">
                 <a:solidFill>
+                  <a:schemeClr val="accent4"/>
+                </a:solidFill>
+              </a:rPr>
+              <a:t>Rook</a:t>
+            </a:r>
+            <a:r>
+              <a:rPr lang="en-US" sz="1350" b="1" dirty="0">
+                <a:solidFill>
                   <a:srgbClr val="E95563"/>
                 </a:solidFill>
               </a:rPr>
-              <a:t>Starts at 100</a:t>
-            </a:r>
-            <a:endParaRPr lang="en-US" sz="1350" dirty="0"/>
+              <a:t> </a:t>
+            </a:r>
+            <a:r>
+              <a:rPr lang="en-US" sz="1350" b="1" dirty="0">
+                <a:solidFill>
+                  <a:srgbClr val="FF5050"/>
+                </a:solidFill>
+              </a:rPr>
+              <a:t>&amp;</a:t>
+            </a:r>
+            <a:r>
+              <a:rPr lang="en-US" sz="1350" b="1" dirty="0">
+                <a:solidFill>
+                  <a:srgbClr val="E95563"/>
+                </a:solidFill>
+              </a:rPr>
+              <a:t> </a:t>
+            </a:r>
+            <a:r>
+              <a:rPr lang="en-US" sz="1350" b="1" dirty="0">
+                <a:solidFill>
+                  <a:schemeClr val="accent1"/>
+                </a:solidFill>
+              </a:rPr>
+              <a:t>Bishop</a:t>
+            </a:r>
+            <a:endParaRPr lang="en-US" sz="1350" dirty="0">
+              <a:solidFill>
+                <a:schemeClr val="accent1"/>
+              </a:solidFill>
+            </a:endParaRPr>
           </a:p>
         </p:txBody>
       </p:sp>
@@ -3597,11 +3697,17 @@
             </a:avLst>
           </a:prstGeom>
           <a:solidFill>
-            <a:srgbClr val="FFFCF4"/>
+            <a:schemeClr val="accent6">
+              <a:lumMod val="40000"/>
+              <a:lumOff val="60000"/>
+            </a:schemeClr>
           </a:solidFill>
           <a:ln w="12700">
             <a:solidFill>
-              <a:srgbClr val="F8E4B6"/>
+              <a:schemeClr val="accent6">
+                <a:lumMod val="60000"/>
+                <a:lumOff val="40000"/>
+              </a:schemeClr>
             </a:solidFill>
             <a:prstDash val="solid"/>
           </a:ln>
@@ -3644,7 +3750,7 @@
                   <a:srgbClr val="53657A"/>
                 </a:solidFill>
               </a:rPr>
-              <a:t>BATTLE TIMER</a:t>
+              <a:t>Med kit</a:t>
             </a:r>
             <a:endParaRPr lang="en-US" sz="850" dirty="0"/>
           </a:p>
@@ -3677,12 +3783,16 @@
             <a:r>
               <a:rPr lang="en-US" sz="1350" b="1" dirty="0">
                 <a:solidFill>
-                  <a:srgbClr val="F4B64D"/>
-                </a:solidFill>
-              </a:rPr>
-              <a:t>17 seconds</a:t>
-            </a:r>
-            <a:endParaRPr lang="en-US" sz="1350" dirty="0"/>
+                  <a:srgbClr val="FF5050"/>
+                </a:solidFill>
+              </a:rPr>
+              <a:t>+5 Health</a:t>
+            </a:r>
+            <a:endParaRPr lang="en-US" sz="1350" dirty="0">
+              <a:solidFill>
+                <a:srgbClr val="FF5050"/>
+              </a:solidFill>
+            </a:endParaRPr>
           </a:p>
         </p:txBody>
       </p:sp>
@@ -3750,7 +3860,7 @@
                   <a:srgbClr val="53657A"/>
                 </a:solidFill>
               </a:rPr>
-              <a:t>TUNING</a:t>
+              <a:t>Hints</a:t>
             </a:r>
             <a:endParaRPr lang="en-US" sz="850" dirty="0"/>
           </a:p>
@@ -3764,7 +3874,7 @@
         </p:nvSpPr>
         <p:spPr>
           <a:xfrm>
-            <a:off x="4038039" y="4595341"/>
+            <a:off x="4038039" y="4530370"/>
             <a:ext cx="1179576" cy="393192"/>
           </a:xfrm>
           <a:prstGeom prst="rect">
@@ -3786,7 +3896,7 @@
                   <a:srgbClr val="00C7D9"/>
                 </a:solidFill>
               </a:rPr>
-              <a:t>Damage + hints</a:t>
+              <a:t>-2 Health</a:t>
             </a:r>
             <a:endParaRPr lang="en-US" sz="1350" dirty="0"/>
           </a:p>
@@ -3862,9 +3972,35 @@
             <a:off x="5650992" y="1607605"/>
             <a:ext cx="6214751" cy="3558755"/>
           </a:xfrm>
-          <a:prstGeom prst="rect">
-            <a:avLst/>
-          </a:prstGeom>
+          <a:prstGeom prst="roundRect">
+            <a:avLst>
+              <a:gd name="adj" fmla="val 4167"/>
+            </a:avLst>
+          </a:prstGeom>
+          <a:solidFill>
+            <a:srgbClr val="FFFFFF"/>
+          </a:solidFill>
+          <a:ln w="76200" cap="sq">
+            <a:solidFill>
+              <a:srgbClr val="292929"/>
+            </a:solidFill>
+            <a:miter lim="800000"/>
+          </a:ln>
+          <a:effectLst>
+            <a:reflection blurRad="12700" stA="28000" endPos="28000" dist="5000" dir="5400000" sy="-100000" algn="bl" rotWithShape="0"/>
+          </a:effectLst>
+          <a:scene3d>
+            <a:camera prst="orthographicFront"/>
+            <a:lightRig rig="threePt" dir="t">
+              <a:rot lat="0" lon="0" rev="2700000"/>
+            </a:lightRig>
+          </a:scene3d>
+          <a:sp3d>
+            <a:bevelT h="38100"/>
+            <a:contourClr>
+              <a:srgbClr val="C0C0C0"/>
+            </a:contourClr>
+          </a:sp3d>
         </p:spPr>
       </p:pic>
     </p:spTree>
@@ -3986,12 +4122,41 @@
         </p:blipFill>
         <p:spPr>
           <a:xfrm>
-            <a:off x="6902164" y="1005840"/>
-            <a:ext cx="3818130" cy="2148840"/>
-          </a:xfrm>
-          <a:prstGeom prst="rect">
-            <a:avLst/>
-          </a:prstGeom>
+            <a:off x="7031736" y="586614"/>
+            <a:ext cx="4072890" cy="2292218"/>
+          </a:xfrm>
+          <a:prstGeom prst="rect">
+            <a:avLst/>
+          </a:prstGeom>
+          <a:solidFill>
+            <a:srgbClr val="FFFFFF">
+              <a:shade val="85000"/>
+            </a:srgbClr>
+          </a:solidFill>
+          <a:ln w="190500" cap="rnd">
+            <a:solidFill>
+              <a:srgbClr val="FFFFFF"/>
+            </a:solidFill>
+          </a:ln>
+          <a:effectLst>
+            <a:outerShdw blurRad="36195" dist="12700" dir="11400000" algn="tl" rotWithShape="0">
+              <a:srgbClr val="000000">
+                <a:alpha val="33000"/>
+              </a:srgbClr>
+            </a:outerShdw>
+          </a:effectLst>
+          <a:scene3d>
+            <a:camera prst="perspectiveContrastingLeftFacing">
+              <a:rot lat="540000" lon="2100000" rev="0"/>
+            </a:camera>
+            <a:lightRig rig="soft" dir="t"/>
+          </a:scene3d>
+          <a:sp3d contourW="12700" prstMaterial="matte">
+            <a:bevelT w="63500" h="50800"/>
+            <a:contourClr>
+              <a:srgbClr val="C0C0C0"/>
+            </a:contourClr>
+          </a:sp3d>
         </p:spPr>
       </p:pic>
       <p:sp>
@@ -4041,7 +4206,7 @@
             <a:avLst/>
           </a:prstGeom>
           <a:solidFill>
-            <a:srgbClr val="22B8CF"/>
+            <a:srgbClr val="085688"/>
           </a:solidFill>
           <a:ln w="12700">
             <a:solidFill>
@@ -4195,12 +4360,16 @@
             <a:r>
               <a:rPr lang="en-US" sz="1400" b="1" dirty="0">
                 <a:solidFill>
-                  <a:srgbClr val="22B8CF"/>
+                  <a:srgbClr val="085688"/>
                 </a:solidFill>
               </a:rPr>
               <a:t>Caesar cipher</a:t>
             </a:r>
-            <a:endParaRPr lang="en-US" sz="1400" dirty="0"/>
+            <a:endParaRPr lang="en-US" sz="1400" dirty="0">
+              <a:solidFill>
+                <a:srgbClr val="085688"/>
+              </a:solidFill>
+            </a:endParaRPr>
           </a:p>
         </p:txBody>
       </p:sp>
@@ -4251,7 +4420,7 @@
             <a:avLst/>
           </a:prstGeom>
           <a:solidFill>
-            <a:srgbClr val="1FB6C9"/>
+            <a:srgbClr val="74D221"/>
           </a:solidFill>
           <a:ln w="12700">
             <a:solidFill>
@@ -4405,12 +4574,16 @@
             <a:r>
               <a:rPr lang="en-US" sz="1400" b="1" dirty="0">
                 <a:solidFill>
-                  <a:srgbClr val="1FB6C9"/>
+                  <a:srgbClr val="74D221"/>
                 </a:solidFill>
               </a:rPr>
               <a:t>Reverse</a:t>
             </a:r>
-            <a:endParaRPr lang="en-US" sz="1400" dirty="0"/>
+            <a:endParaRPr lang="en-US" sz="1400" dirty="0">
+              <a:solidFill>
+                <a:srgbClr val="74D221"/>
+              </a:solidFill>
+            </a:endParaRPr>
           </a:p>
         </p:txBody>
       </p:sp>
@@ -4461,7 +4634,7 @@
             <a:avLst/>
           </a:prstGeom>
           <a:solidFill>
-            <a:srgbClr val="2EC27E"/>
+            <a:srgbClr val="EB311D"/>
           </a:solidFill>
           <a:ln w="12700">
             <a:solidFill>
@@ -4615,12 +4788,16 @@
             <a:r>
               <a:rPr lang="en-US" sz="1400" b="1" dirty="0">
                 <a:solidFill>
-                  <a:srgbClr val="2EC27E"/>
+                  <a:srgbClr val="EB311D"/>
                 </a:solidFill>
               </a:rPr>
               <a:t>Atbash</a:t>
             </a:r>
-            <a:endParaRPr lang="en-US" sz="1400" dirty="0"/>
+            <a:endParaRPr lang="en-US" sz="1400" dirty="0">
+              <a:solidFill>
+                <a:srgbClr val="EB311D"/>
+              </a:solidFill>
+            </a:endParaRPr>
           </a:p>
         </p:txBody>
       </p:sp>
@@ -4671,7 +4848,7 @@
             <a:avLst/>
           </a:prstGeom>
           <a:solidFill>
-            <a:srgbClr val="2EC27E"/>
+            <a:srgbClr val="35E3FB"/>
           </a:solidFill>
           <a:ln w="12700">
             <a:solidFill>
@@ -4825,12 +5002,16 @@
             <a:r>
               <a:rPr lang="en-US" sz="1400" b="1" dirty="0">
                 <a:solidFill>
-                  <a:srgbClr val="2EC27E"/>
+                  <a:srgbClr val="35E3FB"/>
                 </a:solidFill>
               </a:rPr>
               <a:t>Rail Fence</a:t>
             </a:r>
-            <a:endParaRPr lang="en-US" sz="1400" dirty="0"/>
+            <a:endParaRPr lang="en-US" sz="1400" dirty="0">
+              <a:solidFill>
+                <a:srgbClr val="35E3FB"/>
+              </a:solidFill>
+            </a:endParaRPr>
           </a:p>
         </p:txBody>
       </p:sp>
@@ -5091,7 +5272,7 @@
             <a:avLst/>
           </a:prstGeom>
           <a:solidFill>
-            <a:srgbClr val="F4B64D"/>
+            <a:srgbClr val="F41A4A"/>
           </a:solidFill>
           <a:ln w="12700">
             <a:solidFill>
@@ -5245,12 +5426,16 @@
             <a:r>
               <a:rPr lang="en-US" sz="1400" b="1" dirty="0">
                 <a:solidFill>
-                  <a:srgbClr val="F4B64D"/>
+                  <a:srgbClr val="F41A4A"/>
                 </a:solidFill>
               </a:rPr>
               <a:t>Columnar Transposition</a:t>
             </a:r>
-            <a:endParaRPr lang="en-US" sz="1400" dirty="0"/>
+            <a:endParaRPr lang="en-US" sz="1400" dirty="0">
+              <a:solidFill>
+                <a:srgbClr val="F41A4A"/>
+              </a:solidFill>
+            </a:endParaRPr>
           </a:p>
         </p:txBody>
       </p:sp>
@@ -5358,7 +5543,7 @@
             <a:avLst/>
           </a:prstGeom>
           <a:solidFill>
-            <a:srgbClr val="C00000"/>
+            <a:schemeClr val="tx1"/>
           </a:solidFill>
           <a:ln w="12700">
             <a:solidFill>
@@ -5534,18 +5719,10 @@
               <a:buNone/>
             </a:pPr>
             <a:r>
-              <a:rPr lang="en-US" sz="1400" b="1" dirty="0">
-                <a:solidFill>
-                  <a:srgbClr val="C00000"/>
-                </a:solidFill>
-              </a:rPr>
+              <a:rPr lang="en-US" sz="1400" b="1" dirty="0"/>
               <a:t>Classified</a:t>
             </a:r>
-            <a:endParaRPr lang="en-US" sz="1400" dirty="0">
-              <a:solidFill>
-                <a:srgbClr val="C00000"/>
-              </a:solidFill>
-            </a:endParaRPr>
+            <a:endParaRPr lang="en-US" sz="1400" dirty="0"/>
           </a:p>
         </p:txBody>
       </p:sp>
@@ -5571,12 +5748,38 @@
         </p:blipFill>
         <p:spPr>
           <a:xfrm>
-            <a:off x="6747510" y="3310128"/>
+            <a:off x="7066342" y="3364992"/>
             <a:ext cx="4546538" cy="2906394"/>
           </a:xfrm>
-          <a:prstGeom prst="rect">
-            <a:avLst/>
-          </a:prstGeom>
+          <a:prstGeom prst="roundRect">
+            <a:avLst>
+              <a:gd name="adj" fmla="val 4167"/>
+            </a:avLst>
+          </a:prstGeom>
+          <a:solidFill>
+            <a:srgbClr val="FFFFFF"/>
+          </a:solidFill>
+          <a:ln w="76200" cap="sq">
+            <a:solidFill>
+              <a:srgbClr val="292929"/>
+            </a:solidFill>
+            <a:miter lim="800000"/>
+          </a:ln>
+          <a:effectLst>
+            <a:reflection blurRad="12700" stA="28000" endPos="28000" dist="5000" dir="5400000" sy="-100000" algn="bl" rotWithShape="0"/>
+          </a:effectLst>
+          <a:scene3d>
+            <a:camera prst="orthographicFront"/>
+            <a:lightRig rig="threePt" dir="t">
+              <a:rot lat="0" lon="0" rev="2700000"/>
+            </a:lightRig>
+          </a:scene3d>
+          <a:sp3d>
+            <a:bevelT h="38100"/>
+            <a:contourClr>
+              <a:srgbClr val="C0C0C0"/>
+            </a:contourClr>
+          </a:sp3d>
         </p:spPr>
       </p:pic>
     </p:spTree>
@@ -6246,10 +6449,6 @@
           </p:nvPr>
         </p:nvSpPr>
         <p:spPr>
-          <a:xfrm>
-            <a:off x="11612880" y="137160"/>
-            <a:ext cx="320040" cy="182880"/>
-          </a:xfrm>
           <a:prstGeom prst="rect">
             <a:avLst/>
           </a:prstGeom>
@@ -6366,6 +6565,12 @@
           <a:prstGeom prst="rect">
             <a:avLst/>
           </a:prstGeom>
+          <a:ln>
+            <a:noFill/>
+          </a:ln>
+          <a:effectLst>
+            <a:softEdge rad="112500"/>
+          </a:effectLst>
         </p:spPr>
       </p:pic>
       <p:sp>
@@ -6539,11 +6744,11 @@
             </a:avLst>
           </a:prstGeom>
           <a:solidFill>
-            <a:srgbClr val="F2FCFE"/>
+            <a:srgbClr val="F1E05A"/>
           </a:solidFill>
           <a:ln w="12700">
             <a:solidFill>
-              <a:srgbClr val="C3EEF4"/>
+              <a:srgbClr val="F1E05A"/>
             </a:solidFill>
             <a:prstDash val="solid"/>
           </a:ln>
@@ -6581,11 +6786,7 @@
               <a:buNone/>
             </a:pPr>
             <a:r>
-              <a:rPr lang="en-US" sz="850" b="1" dirty="0">
-                <a:solidFill>
-                  <a:srgbClr val="53657A"/>
-                </a:solidFill>
-              </a:rPr>
+              <a:rPr lang="en-US" sz="850" b="1" dirty="0"/>
               <a:t>JS</a:t>
             </a:r>
             <a:endParaRPr lang="en-US" sz="850" dirty="0"/>
@@ -6645,11 +6846,11 @@
             </a:avLst>
           </a:prstGeom>
           <a:solidFill>
-            <a:srgbClr val="F2FCFE"/>
+            <a:srgbClr val="1470DD"/>
           </a:solidFill>
           <a:ln w="12700">
             <a:solidFill>
-              <a:srgbClr val="C3EEF4"/>
+              <a:srgbClr val="1470DD"/>
             </a:solidFill>
             <a:prstDash val="solid"/>
           </a:ln>
@@ -6658,7 +6859,7 @@
           <a:bodyPr/>
           <a:lstStyle/>
           <a:p>
-            <a:endParaRPr lang="en-US"/>
+            <a:endParaRPr lang="en-US" dirty="0"/>
           </a:p>
         </p:txBody>
       </p:sp>
@@ -6689,12 +6890,16 @@
             <a:r>
               <a:rPr lang="en-US" sz="850" b="1" dirty="0">
                 <a:solidFill>
-                  <a:srgbClr val="53657A"/>
+                  <a:schemeClr val="bg1"/>
                 </a:solidFill>
               </a:rPr>
               <a:t>CSS</a:t>
             </a:r>
-            <a:endParaRPr lang="en-US" sz="850" dirty="0"/>
+            <a:endParaRPr lang="en-US" sz="850" dirty="0">
+              <a:solidFill>
+                <a:schemeClr val="bg1"/>
+              </a:solidFill>
+            </a:endParaRPr>
           </a:p>
         </p:txBody>
       </p:sp>
@@ -6751,11 +6956,11 @@
             </a:avLst>
           </a:prstGeom>
           <a:solidFill>
-            <a:srgbClr val="F2FCFE"/>
+            <a:srgbClr val="E34C26"/>
           </a:solidFill>
           <a:ln w="12700">
             <a:solidFill>
-              <a:srgbClr val="C3EEF4"/>
+              <a:srgbClr val="E34C26"/>
             </a:solidFill>
             <a:prstDash val="solid"/>
           </a:ln>
@@ -6795,12 +7000,16 @@
             <a:r>
               <a:rPr lang="en-US" sz="850" b="1" dirty="0">
                 <a:solidFill>
-                  <a:srgbClr val="53657A"/>
+                  <a:schemeClr val="bg1"/>
                 </a:solidFill>
               </a:rPr>
               <a:t>HTML</a:t>
             </a:r>
-            <a:endParaRPr lang="en-US" sz="850" dirty="0"/>
+            <a:endParaRPr lang="en-US" sz="850" dirty="0">
+              <a:solidFill>
+                <a:schemeClr val="bg1"/>
+              </a:solidFill>
+            </a:endParaRPr>
           </a:p>
         </p:txBody>
       </p:sp>
@@ -7019,7 +7228,7 @@
           </a:xfrm>
           <a:prstGeom prst="roundRect">
             <a:avLst>
-              <a:gd name="adj" fmla="val 3733"/>
+              <a:gd name="adj" fmla="val 2400"/>
             </a:avLst>
           </a:prstGeom>
           <a:solidFill>
@@ -7027,7 +7236,9 @@
           </a:solidFill>
           <a:ln w="12700">
             <a:solidFill>
-              <a:srgbClr val="DCE8EF"/>
+              <a:schemeClr val="bg2">
+                <a:lumMod val="90000"/>
+              </a:schemeClr>
             </a:solidFill>
             <a:prstDash val="solid"/>
           </a:ln>
@@ -7119,56 +7330,45 @@
           <a:lstStyle/>
           <a:p>
             <a:r>
-              <a:rPr lang="en-US" sz="1200" dirty="0">
+              <a:rPr lang="en-US" sz="1400" dirty="0">
                 <a:solidFill>
                   <a:srgbClr val="0E2230"/>
                 </a:solidFill>
               </a:rPr>
               <a:t>A complete single-page browser game with desktop and mobile support.</a:t>
             </a:r>
-            <a:endParaRPr lang="en-US" sz="1200" dirty="0"/>
-          </a:p>
-          <a:p>
-            <a:r>
-              <a:rPr lang="en-US" sz="1200" dirty="0">
+            <a:endParaRPr lang="en-US" sz="1400" dirty="0"/>
+          </a:p>
+          <a:p>
+            <a:r>
+              <a:rPr lang="en-US" sz="1400" dirty="0">
                 <a:solidFill>
                   <a:srgbClr val="0E2230"/>
                 </a:solidFill>
               </a:rPr>
               <a:t>Six main cipher rooms plus a hidden final challenge.</a:t>
             </a:r>
-            <a:endParaRPr lang="en-US" sz="1200" dirty="0"/>
-          </a:p>
-          <a:p>
-            <a:r>
-              <a:rPr lang="en-US" sz="1200" dirty="0">
+            <a:endParaRPr lang="en-US" sz="1400" dirty="0"/>
+          </a:p>
+          <a:p>
+            <a:r>
+              <a:rPr lang="en-US" sz="1400" dirty="0">
                 <a:solidFill>
                   <a:srgbClr val="0E2230"/>
                 </a:solidFill>
               </a:rPr>
               <a:t>Cybersecurity concepts presented through movement, enemies, health, keys, and timed cipher battles.</a:t>
             </a:r>
-            <a:endParaRPr lang="en-US" sz="1200" dirty="0"/>
-          </a:p>
-          <a:p>
-            <a:r>
-              <a:rPr lang="en-US" sz="1200" dirty="0">
-                <a:solidFill>
-                  <a:srgbClr val="0E2230"/>
-                </a:solidFill>
-              </a:rPr>
-              <a:t>Code is organized so simple gameplay changes can be explained and tested live.</a:t>
-            </a:r>
-            <a:endParaRPr lang="en-US" sz="1200" dirty="0"/>
-          </a:p>
-        </p:txBody>
-      </p:sp>
-      <p:sp>
-        <p:nvSpPr>
-          <p:cNvPr id="31" name="Shape 8">
+            <a:endParaRPr lang="en-US" sz="1400" dirty="0"/>
+          </a:p>
+        </p:txBody>
+      </p:sp>
+      <p:sp>
+        <p:nvSpPr>
+          <p:cNvPr id="34" name="Shape 11">
             <a:extLst>
               <a:ext uri="{FF2B5EF4-FFF2-40B4-BE49-F238E27FC236}">
-                <a16:creationId xmlns:a16="http://schemas.microsoft.com/office/drawing/2014/main" id="{89888584-00DF-BB85-766C-9408105CBFA4}"/>
+                <a16:creationId xmlns:a16="http://schemas.microsoft.com/office/drawing/2014/main" id="{D2A22A04-8E5F-E0D5-3320-478D27654BB2}"/>
               </a:ext>
             </a:extLst>
           </p:cNvPr>
@@ -7177,20 +7377,22 @@
         </p:nvSpPr>
         <p:spPr>
           <a:xfrm>
-            <a:off x="6263640" y="1545336"/>
-            <a:ext cx="4983480" cy="1298448"/>
+            <a:off x="6495288" y="1545336"/>
+            <a:ext cx="4983480" cy="3429000"/>
           </a:xfrm>
           <a:prstGeom prst="roundRect">
             <a:avLst>
-              <a:gd name="adj" fmla="val 9859"/>
+              <a:gd name="adj" fmla="val 2074"/>
             </a:avLst>
           </a:prstGeom>
           <a:solidFill>
-            <a:srgbClr val="061827"/>
+            <a:srgbClr val="FFFFFF"/>
           </a:solidFill>
           <a:ln w="12700">
             <a:solidFill>
-              <a:srgbClr val="061827"/>
+              <a:schemeClr val="bg2">
+                <a:lumMod val="90000"/>
+              </a:schemeClr>
             </a:solidFill>
             <a:prstDash val="solid"/>
           </a:ln>
@@ -7212,139 +7414,6 @@
       </p:sp>
       <p:sp>
         <p:nvSpPr>
-          <p:cNvPr id="32" name="Text 9">
-            <a:extLst>
-              <a:ext uri="{FF2B5EF4-FFF2-40B4-BE49-F238E27FC236}">
-                <a16:creationId xmlns:a16="http://schemas.microsoft.com/office/drawing/2014/main" id="{0DADD0F2-F353-AC7F-167A-600ECF3C88B1}"/>
-              </a:ext>
-            </a:extLst>
-          </p:cNvPr>
-          <p:cNvSpPr/>
-          <p:nvPr/>
-        </p:nvSpPr>
-        <p:spPr>
-          <a:xfrm>
-            <a:off x="6547104" y="1723644"/>
-            <a:ext cx="2560320" cy="219456"/>
-          </a:xfrm>
-          <a:prstGeom prst="rect">
-            <a:avLst/>
-          </a:prstGeom>
-          <a:noFill/>
-          <a:ln/>
-        </p:spPr>
-        <p:txBody>
-          <a:bodyPr wrap="square" lIns="0" tIns="0" rIns="0" bIns="0" rtlCol="0" anchor="ctr"/>
-          <a:lstStyle/>
-          <a:p>
-            <a:pPr marL="0" indent="0">
-              <a:buNone/>
-            </a:pPr>
-            <a:r>
-              <a:rPr lang="en-US" sz="1600" b="1" dirty="0">
-                <a:solidFill>
-                  <a:srgbClr val="F0B429"/>
-                </a:solidFill>
-              </a:rPr>
-              <a:t>AI USAGE STATEMENT</a:t>
-            </a:r>
-            <a:endParaRPr lang="en-US" sz="1600" dirty="0"/>
-          </a:p>
-        </p:txBody>
-      </p:sp>
-      <p:sp>
-        <p:nvSpPr>
-          <p:cNvPr id="33" name="Text 10">
-            <a:extLst>
-              <a:ext uri="{FF2B5EF4-FFF2-40B4-BE49-F238E27FC236}">
-                <a16:creationId xmlns:a16="http://schemas.microsoft.com/office/drawing/2014/main" id="{18CB2726-5814-E8F5-3F22-1425501E369A}"/>
-              </a:ext>
-            </a:extLst>
-          </p:cNvPr>
-          <p:cNvSpPr/>
-          <p:nvPr/>
-        </p:nvSpPr>
-        <p:spPr>
-          <a:xfrm>
-            <a:off x="6547104" y="1743857"/>
-            <a:ext cx="4315968" cy="1149016"/>
-          </a:xfrm>
-          <a:prstGeom prst="rect">
-            <a:avLst/>
-          </a:prstGeom>
-          <a:noFill/>
-          <a:ln/>
-        </p:spPr>
-        <p:txBody>
-          <a:bodyPr wrap="square" lIns="254" tIns="254" rIns="254" bIns="254" rtlCol="0" anchor="ctr">
-            <a:noAutofit/>
-          </a:bodyPr>
-          <a:lstStyle/>
-          <a:p>
-            <a:pPr marL="0" indent="0">
-              <a:buNone/>
-            </a:pPr>
-            <a:r>
-              <a:rPr lang="en-US" sz="1200" dirty="0">
-                <a:solidFill>
-                  <a:srgbClr val="FFFFFF"/>
-                </a:solidFill>
-              </a:rPr>
-              <a:t>The concept, mechanics, level choices, and design direction came from the student team. AI support was used for implementation help, debugging, and refinement only.</a:t>
-            </a:r>
-            <a:endParaRPr lang="en-US" sz="1200" dirty="0"/>
-          </a:p>
-        </p:txBody>
-      </p:sp>
-      <p:sp>
-        <p:nvSpPr>
-          <p:cNvPr id="34" name="Shape 11">
-            <a:extLst>
-              <a:ext uri="{FF2B5EF4-FFF2-40B4-BE49-F238E27FC236}">
-                <a16:creationId xmlns:a16="http://schemas.microsoft.com/office/drawing/2014/main" id="{D2A22A04-8E5F-E0D5-3320-478D27654BB2}"/>
-              </a:ext>
-            </a:extLst>
-          </p:cNvPr>
-          <p:cNvSpPr/>
-          <p:nvPr/>
-        </p:nvSpPr>
-        <p:spPr>
-          <a:xfrm>
-            <a:off x="6263640" y="3246120"/>
-            <a:ext cx="4983480" cy="1728216"/>
-          </a:xfrm>
-          <a:prstGeom prst="roundRect">
-            <a:avLst>
-              <a:gd name="adj" fmla="val 7407"/>
-            </a:avLst>
-          </a:prstGeom>
-          <a:solidFill>
-            <a:srgbClr val="FFFFFF"/>
-          </a:solidFill>
-          <a:ln w="12700">
-            <a:solidFill>
-              <a:srgbClr val="BEEAF2"/>
-            </a:solidFill>
-            <a:prstDash val="solid"/>
-          </a:ln>
-          <a:effectLst>
-            <a:outerShdw blurRad="12700" dist="50800" dir="2700000" algn="bl" rotWithShape="0">
-              <a:srgbClr val="CFDDE5">
-                <a:alpha val="18000"/>
-              </a:srgbClr>
-            </a:outerShdw>
-          </a:effectLst>
-        </p:spPr>
-        <p:txBody>
-          <a:bodyPr/>
-          <a:lstStyle/>
-          <a:p>
-            <a:endParaRPr lang="en-US" sz="2800"/>
-          </a:p>
-        </p:txBody>
-      </p:sp>
-      <p:sp>
-        <p:nvSpPr>
           <p:cNvPr id="35" name="Text 12">
             <a:extLst>
               <a:ext uri="{FF2B5EF4-FFF2-40B4-BE49-F238E27FC236}">
@@ -7357,7 +7426,7 @@
         </p:nvSpPr>
         <p:spPr>
           <a:xfrm>
-            <a:off x="6547104" y="3429000"/>
+            <a:off x="6778752" y="1807624"/>
             <a:ext cx="2103120" cy="237744"/>
           </a:xfrm>
           <a:prstGeom prst="rect">
@@ -7399,8 +7468,8 @@
         </p:nvSpPr>
         <p:spPr>
           <a:xfrm>
-            <a:off x="6547104" y="3931920"/>
-            <a:ext cx="4297680" cy="475488"/>
+            <a:off x="6778752" y="2350008"/>
+            <a:ext cx="4297680" cy="909828"/>
           </a:xfrm>
           <a:prstGeom prst="rect">
             <a:avLst/>
@@ -7418,14 +7487,14 @@
               <a:buNone/>
             </a:pPr>
             <a:r>
-              <a:rPr lang="en-US" sz="1200" dirty="0">
+              <a:rPr lang="en-US" sz="1400" dirty="0">
                 <a:solidFill>
                   <a:srgbClr val="0E2230"/>
                 </a:solidFill>
               </a:rPr>
-              <a:t>The project is ready to demonstrate because it has a clear learning goal, visible gameplay systems, editable balancing values, and a direct connection between cryptography and game mechanics.</a:t>
-            </a:r>
-            <a:endParaRPr lang="en-US" sz="1200" dirty="0"/>
+              <a:t>The project is ready because it has fully deployed gameplay mechanics, visible systems, balanced values that fits casual gamers, and a direct connection between cryptography and game mechanics.</a:t>
+            </a:r>
+            <a:endParaRPr lang="en-US" sz="1400" dirty="0"/>
           </a:p>
         </p:txBody>
       </p:sp>
@@ -7475,7 +7544,7 @@
         <p:spPr>
           <a:xfrm>
             <a:off x="3604260" y="896473"/>
-            <a:ext cx="4983480" cy="1728216"/>
+            <a:ext cx="4983480" cy="5203538"/>
           </a:xfrm>
           <a:prstGeom prst="roundRect">
             <a:avLst>

--- a/Cipher_Breach_Presentation.pptx
+++ b/Cipher_Breach_Presentation.pptx
@@ -4067,45 +4067,6 @@
           </a:p>
         </p:txBody>
       </p:sp>
-      <p:sp>
-        <p:nvSpPr>
-          <p:cNvPr id="3" name="Text 1"/>
-          <p:cNvSpPr/>
-          <p:nvPr/>
-        </p:nvSpPr>
-        <p:spPr>
-          <a:xfrm>
-            <a:off x="676656" y="886968"/>
-            <a:ext cx="6309360" cy="310896"/>
-          </a:xfrm>
-          <a:prstGeom prst="rect">
-            <a:avLst/>
-          </a:prstGeom>
-          <a:noFill/>
-          <a:ln/>
-        </p:spPr>
-        <p:txBody>
-          <a:bodyPr wrap="square" lIns="0" tIns="0" rIns="0" bIns="0" rtlCol="0" anchor="ctr"/>
-          <a:lstStyle/>
-          <a:p>
-            <a:pPr marL="0" indent="0">
-              <a:buNone/>
-            </a:pPr>
-            <a:r>
-              <a:rPr lang="en-US" sz="1050" dirty="0">
-                <a:solidFill>
-                  <a:srgbClr val="53657A"/>
-                </a:solidFill>
-                <a:latin typeface="Aptos" pitchFamily="34" charset="0"/>
-                <a:ea typeface="Aptos" pitchFamily="34" charset="-122"/>
-                <a:cs typeface="Aptos" pitchFamily="34" charset="-120"/>
-              </a:rPr>
-              <a:t>Each room pairs one classic method with a security theme.</a:t>
-            </a:r>
-            <a:endParaRPr lang="en-US" sz="1050" dirty="0"/>
-          </a:p>
-        </p:txBody>
-      </p:sp>
       <p:pic>
         <p:nvPicPr>
           <p:cNvPr id="4" name="Image 0" descr="/mnt/data/wide_clean_white_background_minimalist_infographi_batch_4.png"/>
@@ -7329,6 +7290,10 @@
           </a:bodyPr>
           <a:lstStyle/>
           <a:p>
+            <a:pPr marL="285750" indent="-285750">
+              <a:buFont typeface="Arial" panose="020B0604020202020204" pitchFamily="34" charset="0"/>
+              <a:buChar char="•"/>
+            </a:pPr>
             <a:r>
               <a:rPr lang="en-US" sz="1400" dirty="0">
                 <a:solidFill>
@@ -7340,6 +7305,10 @@
             <a:endParaRPr lang="en-US" sz="1400" dirty="0"/>
           </a:p>
           <a:p>
+            <a:pPr marL="285750" indent="-285750">
+              <a:buFont typeface="Arial" panose="020B0604020202020204" pitchFamily="34" charset="0"/>
+              <a:buChar char="•"/>
+            </a:pPr>
             <a:r>
               <a:rPr lang="en-US" sz="1400" dirty="0">
                 <a:solidFill>
@@ -7351,13 +7320,17 @@
             <a:endParaRPr lang="en-US" sz="1400" dirty="0"/>
           </a:p>
           <a:p>
+            <a:pPr marL="285750" indent="-285750">
+              <a:buFont typeface="Arial" panose="020B0604020202020204" pitchFamily="34" charset="0"/>
+              <a:buChar char="•"/>
+            </a:pPr>
             <a:r>
               <a:rPr lang="en-US" sz="1400" dirty="0">
                 <a:solidFill>
                   <a:srgbClr val="0E2230"/>
                 </a:solidFill>
               </a:rPr>
-              <a:t>Cybersecurity concepts presented through movement, enemies, health, keys, and timed cipher battles.</a:t>
+              <a:t>Cybersecurity concepts presented through gameplay.</a:t>
             </a:r>
             <a:endParaRPr lang="en-US" sz="1400" dirty="0"/>
           </a:p>

--- a/Cipher_Breach_Presentation.pptx
+++ b/Cipher_Breach_Presentation.pptx
@@ -1192,7 +1192,7 @@
           </a:prstGeom>
           <a:extLst>
             <a:ext uri="{C572A759-6A51-4108-AA02-DFA0A04FC94B}">
-              <ma14:wrappingTextBoxFlag xmlns="" xmlns:ma14="http://schemas.microsoft.com/office/mac/drawingml/2011/main" val="0"/>
+              <ma14:wrappingTextBoxFlag xmlns:ma14="http://schemas.microsoft.com/office/mac/drawingml/2011/main" xmlns="" val="0"/>
             </a:ext>
           </a:extLst>
         </p:spPr>
@@ -1267,7 +1267,7 @@
           </a:prstGeom>
           <a:extLst>
             <a:ext uri="{C572A759-6A51-4108-AA02-DFA0A04FC94B}">
-              <ma14:wrappingTextBoxFlag xmlns="" xmlns:ma14="http://schemas.microsoft.com/office/mac/drawingml/2011/main" val="0"/>
+              <ma14:wrappingTextBoxFlag xmlns:ma14="http://schemas.microsoft.com/office/mac/drawingml/2011/main" xmlns="" val="0"/>
             </a:ext>
           </a:extLst>
         </p:spPr>
@@ -1602,7 +1602,7 @@
           </a:prstGeom>
           <a:extLst>
             <a:ext uri="{C572A759-6A51-4108-AA02-DFA0A04FC94B}">
-              <ma14:wrappingTextBoxFlag xmlns="" xmlns:ma14="http://schemas.microsoft.com/office/mac/drawingml/2011/main" val="0"/>
+              <ma14:wrappingTextBoxFlag xmlns:ma14="http://schemas.microsoft.com/office/mac/drawingml/2011/main" xmlns="" val="0"/>
             </a:ext>
           </a:extLst>
         </p:spPr>
@@ -2797,16 +2797,14 @@
           <a:bodyPr wrap="square" lIns="0" tIns="0" rIns="0" bIns="0" rtlCol="0" anchor="ctr"/>
           <a:lstStyle/>
           <a:p>
-            <a:pPr marL="0" indent="0">
-              <a:buNone/>
-            </a:pPr>
             <a:r>
               <a:rPr lang="en-US" sz="1400" b="1" dirty="0">
                 <a:solidFill>
-                  <a:srgbClr val="00C7D9"/>
-                </a:solidFill>
-              </a:rPr>
-              <a:t>Player goal</a:t>
+                  <a:srgbClr val="0F2233"/>
+                </a:solidFill>
+                <a:latin typeface="Aptos Display" pitchFamily="34" charset="0"/>
+              </a:rPr>
+              <a:t>Design Philosophy</a:t>
             </a:r>
             <a:endParaRPr lang="en-US" sz="1400" dirty="0"/>
           </a:p>
@@ -2820,32 +2818,78 @@
         </p:nvSpPr>
         <p:spPr>
           <a:xfrm>
-            <a:off x="749808" y="2953512"/>
-            <a:ext cx="5120640" cy="1024128"/>
-          </a:xfrm>
-          <a:prstGeom prst="rect">
-            <a:avLst/>
-          </a:prstGeom>
-          <a:noFill/>
-          <a:ln/>
-        </p:spPr>
-        <p:txBody>
-          <a:bodyPr wrap="square" lIns="0" tIns="0" rIns="0" bIns="0" rtlCol="0" anchor="ctr"/>
-          <a:lstStyle/>
-          <a:p>
-            <a:pPr marL="0" indent="0">
-              <a:buNone/>
+            <a:off x="749808" y="2679192"/>
+            <a:ext cx="5822442" cy="2045970"/>
+          </a:xfrm>
+          <a:prstGeom prst="rect">
+            <a:avLst/>
+          </a:prstGeom>
+          <a:noFill/>
+          <a:ln/>
+        </p:spPr>
+        <p:txBody>
+          <a:bodyPr wrap="square" lIns="0" tIns="0" rIns="0" bIns="0" rtlCol="0" anchor="ctr"/>
+          <a:lstStyle/>
+          <a:p>
+            <a:pPr marL="285750" indent="-285750">
+              <a:buFont typeface="Arial" panose="020B0604020202020204" pitchFamily="34" charset="0"/>
+              <a:buChar char="•"/>
             </a:pPr>
             <a:r>
               <a:rPr lang="en-US" sz="1600" dirty="0">
-                <a:solidFill>
-                  <a:srgbClr val="0F2233"/>
-                </a:solidFill>
+                <a:latin typeface="Aptos" pitchFamily="34" charset="0"/>
+              </a:rPr>
+              <a:t>Teach security through interaction</a:t>
+            </a:r>
+          </a:p>
+          <a:p>
+            <a:pPr marL="285750" indent="-285750">
+              <a:buFont typeface="Arial" panose="020B0604020202020204" pitchFamily="34" charset="0"/>
+              <a:buChar char="•"/>
+            </a:pPr>
+            <a:r>
+              <a:rPr lang="en-US" sz="1600" dirty="0">
+                <a:latin typeface="Aptos" pitchFamily="34" charset="0"/>
+              </a:rPr>
+              <a:t>Cyber visual style, clean UI</a:t>
+            </a:r>
+          </a:p>
+          <a:p>
+            <a:pPr marL="285750" indent="-285750">
+              <a:buFont typeface="Arial" panose="020B0604020202020204" pitchFamily="34" charset="0"/>
+              <a:buChar char="•"/>
+            </a:pPr>
+            <a:r>
+              <a:rPr lang="en-US" sz="1600" dirty="0">
+                <a:latin typeface="Aptos" pitchFamily="34" charset="0"/>
+              </a:rPr>
+              <a:t>Simple controls: move, solve, escape</a:t>
+            </a:r>
+          </a:p>
+          <a:p>
+            <a:pPr marL="285750" indent="-285750">
+              <a:buFont typeface="Arial" panose="020B0604020202020204" pitchFamily="34" charset="0"/>
+              <a:buChar char="•"/>
+            </a:pPr>
+            <a:r>
+              <a:rPr lang="en-US" sz="1600" dirty="0">
+                <a:latin typeface="Aptos" pitchFamily="34" charset="0"/>
+              </a:rPr>
+              <a:t>Small project that feels complete</a:t>
+            </a:r>
+          </a:p>
+          <a:p>
+            <a:pPr marL="285750" indent="-285750">
+              <a:buFont typeface="Arial" panose="020B0604020202020204" pitchFamily="34" charset="0"/>
+              <a:buChar char="•"/>
+            </a:pPr>
+            <a:r>
+              <a:rPr lang="en-US" sz="1600" dirty="0">
                 <a:latin typeface="Aptos" pitchFamily="34" charset="0"/>
                 <a:ea typeface="Aptos" pitchFamily="34" charset="-122"/>
                 <a:cs typeface="Aptos" pitchFamily="34" charset="-120"/>
               </a:rPr>
-              <a:t>Escape a hostile digital network by solving cipher rooms, avoiding daemon enemies, collecting the exit key, and clearing each sector.</a:t>
+              <a:t>Escape a hostile digital network by decrypting ciphers</a:t>
             </a:r>
             <a:endParaRPr lang="en-US" sz="1600" dirty="0"/>
           </a:p>
@@ -2859,7 +2903,7 @@
         </p:nvSpPr>
         <p:spPr>
           <a:xfrm>
-            <a:off x="749808" y="4389120"/>
+            <a:off x="754380" y="4521708"/>
             <a:ext cx="1261872" cy="713232"/>
           </a:xfrm>
           <a:prstGeom prst="roundRect">
@@ -2893,7 +2937,7 @@
         </p:nvSpPr>
         <p:spPr>
           <a:xfrm>
-            <a:off x="859536" y="4453128"/>
+            <a:off x="864108" y="4585716"/>
             <a:ext cx="1042416" cy="100584"/>
           </a:xfrm>
           <a:prstGeom prst="rect">
@@ -2929,7 +2973,7 @@
         </p:nvSpPr>
         <p:spPr>
           <a:xfrm>
-            <a:off x="822960" y="4654296"/>
+            <a:off x="827532" y="4786884"/>
             <a:ext cx="1115568" cy="164592"/>
           </a:xfrm>
           <a:prstGeom prst="rect">
@@ -2965,7 +3009,7 @@
         </p:nvSpPr>
         <p:spPr>
           <a:xfrm>
-            <a:off x="2148840" y="4389120"/>
+            <a:off x="2153412" y="4521708"/>
             <a:ext cx="1261872" cy="713232"/>
           </a:xfrm>
           <a:prstGeom prst="roundRect">
@@ -2999,7 +3043,7 @@
         </p:nvSpPr>
         <p:spPr>
           <a:xfrm>
-            <a:off x="2258568" y="4453128"/>
+            <a:off x="2263140" y="4585716"/>
             <a:ext cx="1042416" cy="100584"/>
           </a:xfrm>
           <a:prstGeom prst="rect">
@@ -3035,7 +3079,7 @@
         </p:nvSpPr>
         <p:spPr>
           <a:xfrm>
-            <a:off x="2221992" y="4654296"/>
+            <a:off x="2226564" y="4786884"/>
             <a:ext cx="1115568" cy="164592"/>
           </a:xfrm>
           <a:prstGeom prst="rect">
@@ -3071,7 +3115,7 @@
         </p:nvSpPr>
         <p:spPr>
           <a:xfrm>
-            <a:off x="3547872" y="4389120"/>
+            <a:off x="3552444" y="4521708"/>
             <a:ext cx="1261872" cy="713232"/>
           </a:xfrm>
           <a:prstGeom prst="roundRect">
@@ -3105,7 +3149,7 @@
         </p:nvSpPr>
         <p:spPr>
           <a:xfrm>
-            <a:off x="3657600" y="4453128"/>
+            <a:off x="3662172" y="4585716"/>
             <a:ext cx="1042416" cy="100584"/>
           </a:xfrm>
           <a:prstGeom prst="rect">
@@ -3141,7 +3185,7 @@
         </p:nvSpPr>
         <p:spPr>
           <a:xfrm>
-            <a:off x="3621024" y="4654296"/>
+            <a:off x="3625596" y="4786884"/>
             <a:ext cx="1115568" cy="164592"/>
           </a:xfrm>
           <a:prstGeom prst="rect">
@@ -3177,7 +3221,7 @@
         </p:nvSpPr>
         <p:spPr>
           <a:xfrm>
-            <a:off x="4946904" y="4389120"/>
+            <a:off x="4951476" y="4521708"/>
             <a:ext cx="1261872" cy="713232"/>
           </a:xfrm>
           <a:prstGeom prst="roundRect">
@@ -3211,7 +3255,7 @@
         </p:nvSpPr>
         <p:spPr>
           <a:xfrm>
-            <a:off x="5056632" y="4453128"/>
+            <a:off x="5061204" y="4585716"/>
             <a:ext cx="1042416" cy="100584"/>
           </a:xfrm>
           <a:prstGeom prst="rect">
@@ -3247,7 +3291,7 @@
         </p:nvSpPr>
         <p:spPr>
           <a:xfrm>
-            <a:off x="5020056" y="4654296"/>
+            <a:off x="5024628" y="4786884"/>
             <a:ext cx="1115568" cy="164592"/>
           </a:xfrm>
           <a:prstGeom prst="rect">
@@ -3295,7 +3339,7 @@
           </a:prstGeom>
           <a:extLst>
             <a:ext uri="{C572A759-6A51-4108-AA02-DFA0A04FC94B}">
-              <ma14:wrappingTextBoxFlag xmlns="" xmlns:ma14="http://schemas.microsoft.com/office/mac/drawingml/2011/main" val="0"/>
+              <ma14:wrappingTextBoxFlag xmlns:ma14="http://schemas.microsoft.com/office/mac/drawingml/2011/main" xmlns="" val="0"/>
             </a:ext>
           </a:extLst>
         </p:spPr>
@@ -3459,8 +3503,7 @@
           <a:bodyPr wrap="square" lIns="254" tIns="254" rIns="254" bIns="254" rtlCol="0" anchor="t"/>
           <a:lstStyle/>
           <a:p>
-            <a:pPr marL="177800" indent="-177800">
-              <a:buSzPct val="100000"/>
+            <a:pPr marL="342900" indent="-342900">
               <a:buChar char="•"/>
             </a:pPr>
             <a:r>
@@ -3469,16 +3512,12 @@
                   <a:srgbClr val="0F2233"/>
                 </a:solidFill>
                 <a:latin typeface="Aptos" pitchFamily="34" charset="0"/>
-                <a:ea typeface="Aptos" pitchFamily="34" charset="-122"/>
-                <a:cs typeface="Aptos" pitchFamily="34" charset="-120"/>
-              </a:rPr>
-              <a:t>Explore a room-based 3D map with walls, enemies, a keyholder, and an exit node.</a:t>
-            </a:r>
-            <a:endParaRPr lang="en-US" sz="1600" dirty="0"/>
-          </a:p>
-          <a:p>
-            <a:pPr marL="177800" indent="-177800">
-              <a:buSzPct val="100000"/>
+              </a:rPr>
+              <a:t>Start each room at spawn node</a:t>
+            </a:r>
+          </a:p>
+          <a:p>
+            <a:pPr marL="342900" indent="-342900">
               <a:buChar char="•"/>
             </a:pPr>
             <a:r>
@@ -3487,16 +3526,12 @@
                   <a:srgbClr val="0F2233"/>
                 </a:solidFill>
                 <a:latin typeface="Aptos" pitchFamily="34" charset="0"/>
-                <a:ea typeface="Aptos" pitchFamily="34" charset="-122"/>
-                <a:cs typeface="Aptos" pitchFamily="34" charset="-120"/>
-              </a:rPr>
-              <a:t>Avoid or outmaneuver daemon patrols; if caught, the game opens a cipher battle screen.</a:t>
-            </a:r>
-            <a:endParaRPr lang="en-US" sz="1600" dirty="0"/>
-          </a:p>
-          <a:p>
-            <a:pPr marL="177800" indent="-177800">
-              <a:buSzPct val="100000"/>
+              </a:rPr>
+              <a:t>Find and reach the keyholder</a:t>
+            </a:r>
+          </a:p>
+          <a:p>
+            <a:pPr marL="342900" indent="-342900">
               <a:buChar char="•"/>
             </a:pPr>
             <a:r>
@@ -3505,16 +3540,12 @@
                   <a:srgbClr val="0F2233"/>
                 </a:solidFill>
                 <a:latin typeface="Aptos" pitchFamily="34" charset="0"/>
-                <a:ea typeface="Aptos" pitchFamily="34" charset="-122"/>
-                <a:cs typeface="Aptos" pitchFamily="34" charset="-120"/>
-              </a:rPr>
-              <a:t>Solve the puzzle, secure the exit key, and reach the next room before health runs out.</a:t>
-            </a:r>
-            <a:endParaRPr lang="en-US" sz="1600" dirty="0"/>
-          </a:p>
-          <a:p>
-            <a:pPr marL="177800" indent="-177800">
-              <a:buSzPct val="100000"/>
+              </a:rPr>
+              <a:t>Daemons patrol, detect, then chase</a:t>
+            </a:r>
+          </a:p>
+          <a:p>
+            <a:pPr marL="342900" indent="-342900">
               <a:buChar char="•"/>
             </a:pPr>
             <a:r>
@@ -3523,10 +3554,36 @@
                   <a:srgbClr val="0F2233"/>
                 </a:solidFill>
                 <a:latin typeface="Aptos" pitchFamily="34" charset="0"/>
-                <a:ea typeface="Aptos" pitchFamily="34" charset="-122"/>
-                <a:cs typeface="Aptos" pitchFamily="34" charset="-120"/>
-              </a:rPr>
-              <a:t>Hints help, but they still cost health, so guessing is never free.</a:t>
+              </a:rPr>
+              <a:t>Caught by daemon = cipher battle</a:t>
+            </a:r>
+          </a:p>
+          <a:p>
+            <a:pPr marL="342900" indent="-342900">
+              <a:buChar char="•"/>
+            </a:pPr>
+            <a:r>
+              <a:rPr lang="en-US" sz="1600" dirty="0">
+                <a:solidFill>
+                  <a:srgbClr val="0F2233"/>
+                </a:solidFill>
+                <a:latin typeface="Aptos" pitchFamily="34" charset="0"/>
+              </a:rPr>
+              <a:t>Solve puzzle to secure exit key</a:t>
+            </a:r>
+          </a:p>
+          <a:p>
+            <a:pPr marL="342900" indent="-342900">
+              <a:buChar char="•"/>
+            </a:pPr>
+            <a:r>
+              <a:rPr lang="en-US" sz="1600" dirty="0">
+                <a:solidFill>
+                  <a:srgbClr val="0F2233"/>
+                </a:solidFill>
+                <a:latin typeface="Aptos" pitchFamily="34" charset="0"/>
+              </a:rPr>
+              <a:t>Hints cost HP, guessing isn't free</a:t>
             </a:r>
             <a:endParaRPr lang="en-US" sz="1600" dirty="0"/>
           </a:p>
@@ -3922,7 +3979,7 @@
           </a:prstGeom>
           <a:extLst>
             <a:ext uri="{C572A759-6A51-4108-AA02-DFA0A04FC94B}">
-              <ma14:wrappingTextBoxFlag xmlns="" xmlns:ma14="http://schemas.microsoft.com/office/mac/drawingml/2011/main" val="0"/>
+              <ma14:wrappingTextBoxFlag xmlns:ma14="http://schemas.microsoft.com/office/mac/drawingml/2011/main" xmlns="" val="0"/>
             </a:ext>
           </a:extLst>
         </p:spPr>
@@ -5420,7 +5477,7 @@
           </a:prstGeom>
           <a:extLst>
             <a:ext uri="{C572A759-6A51-4108-AA02-DFA0A04FC94B}">
-              <ma14:wrappingTextBoxFlag xmlns="" xmlns:ma14="http://schemas.microsoft.com/office/mac/drawingml/2011/main" val="0"/>
+              <ma14:wrappingTextBoxFlag xmlns:ma14="http://schemas.microsoft.com/office/mac/drawingml/2011/main" xmlns="" val="0"/>
             </a:ext>
           </a:extLst>
         </p:spPr>
@@ -5894,12 +5951,9 @@
           <a:bodyPr wrap="square" lIns="0" tIns="0" rIns="0" bIns="0" rtlCol="0" anchor="ctr"/>
           <a:lstStyle/>
           <a:p>
-            <a:pPr marL="0" indent="0">
-              <a:buNone/>
-            </a:pPr>
             <a:r>
               <a:rPr lang="en-US" sz="1400" dirty="0"/>
-              <a:t>Patrol, detect, and chase inside the grid.</a:t>
+              <a:t>Patrol, detect, chase the player.</a:t>
             </a:r>
           </a:p>
         </p:txBody>
@@ -5991,12 +6045,9 @@
           <a:bodyPr wrap="square" lIns="0" tIns="0" rIns="0" bIns="0" rtlCol="0" anchor="ctr"/>
           <a:lstStyle/>
           <a:p>
-            <a:pPr marL="0" indent="0">
-              <a:buNone/>
-            </a:pPr>
             <a:r>
               <a:rPr lang="en-US" sz="1400" dirty="0"/>
-              <a:t>Cipher encounters open when a daemon catches the player.</a:t>
+              <a:t>Daemon catches player → cipher opens.</a:t>
             </a:r>
           </a:p>
         </p:txBody>
@@ -6088,12 +6139,9 @@
           <a:bodyPr wrap="square" lIns="0" tIns="0" rIns="0" bIns="0" rtlCol="0" anchor="ctr"/>
           <a:lstStyle/>
           <a:p>
-            <a:pPr marL="0" indent="0">
-              <a:buNone/>
-            </a:pPr>
             <a:r>
               <a:rPr lang="en-US" sz="1400" dirty="0"/>
-              <a:t>Wrong answers, hints, and timer damage all reduce HP.</a:t>
+              <a:t>Wrong answers, hints, timer all drain HP.</a:t>
             </a:r>
           </a:p>
         </p:txBody>
@@ -6185,12 +6233,9 @@
           <a:bodyPr wrap="square" lIns="0" tIns="0" rIns="0" bIns="0" rtlCol="0" anchor="ctr"/>
           <a:lstStyle/>
           <a:p>
-            <a:pPr marL="0" indent="0">
-              <a:buNone/>
-            </a:pPr>
             <a:r>
               <a:rPr lang="en-US" sz="1400" dirty="0"/>
-              <a:t>Key first, exit second. Every room enforces the loop.</a:t>
+              <a:t>Key first, then exit. Always.</a:t>
             </a:r>
           </a:p>
         </p:txBody>
@@ -6415,7 +6460,7 @@
           </a:prstGeom>
           <a:extLst>
             <a:ext uri="{C572A759-6A51-4108-AA02-DFA0A04FC94B}">
-              <ma14:wrappingTextBoxFlag xmlns="" xmlns:ma14="http://schemas.microsoft.com/office/mac/drawingml/2011/main" val="0"/>
+              <ma14:wrappingTextBoxFlag xmlns:ma14="http://schemas.microsoft.com/office/mac/drawingml/2011/main" xmlns="" val="0"/>
             </a:ext>
           </a:extLst>
         </p:spPr>
@@ -6601,7 +6646,7 @@
                 <a:ea typeface="Aptos" pitchFamily="34" charset="-122"/>
                 <a:cs typeface="Aptos" pitchFamily="34" charset="-120"/>
               </a:rPr>
-              <a:t>index.html. screens, overlays, HUD, menus, win/loss states.</a:t>
+              <a:t>index.html - screens, HUD, overlays, menus.</a:t>
             </a:r>
             <a:endParaRPr lang="en-US" sz="1600" dirty="0"/>
           </a:p>
@@ -6616,7 +6661,7 @@
                 <a:ea typeface="Aptos" pitchFamily="34" charset="-122"/>
                 <a:cs typeface="Aptos" pitchFamily="34" charset="-120"/>
               </a:rPr>
-              <a:t>assets/styles.css. visual style, layout, bilingual alignment, mobile rules.</a:t>
+              <a:t>styles.css - layout, style, mobile rules.</a:t>
             </a:r>
             <a:endParaRPr lang="en-US" sz="1600" dirty="0"/>
           </a:p>
@@ -6631,7 +6676,7 @@
                 <a:ea typeface="Aptos" pitchFamily="34" charset="-122"/>
                 <a:cs typeface="Aptos" pitchFamily="34" charset="-120"/>
               </a:rPr>
-              <a:t>assets/game.js. player state, rooms, enemies, health, battles, language switching.</a:t>
+              <a:t>game.js - all logic and game state.</a:t>
             </a:r>
             <a:endParaRPr lang="en-US" sz="1600" dirty="0"/>
           </a:p>
@@ -6646,7 +6691,7 @@
                 <a:ea typeface="Aptos" pitchFamily="34" charset="-122"/>
                 <a:cs typeface="Aptos" pitchFamily="34" charset="-120"/>
               </a:rPr>
-              <a:t>manifest.webmanifest + sw.js. basic PWA packaging for installability and web app behavior.</a:t>
+              <a:t>manifest + sw.js - PWA install ability.</a:t>
             </a:r>
             <a:endParaRPr lang="en-US" sz="1600" dirty="0"/>
           </a:p>
@@ -7030,7 +7075,7 @@
           </a:prstGeom>
           <a:extLst>
             <a:ext uri="{C572A759-6A51-4108-AA02-DFA0A04FC94B}">
-              <ma14:wrappingTextBoxFlag xmlns="" xmlns:ma14="http://schemas.microsoft.com/office/mac/drawingml/2011/main" val="0"/>
+              <ma14:wrappingTextBoxFlag xmlns:ma14="http://schemas.microsoft.com/office/mac/drawingml/2011/main" xmlns="" val="0"/>
             </a:ext>
           </a:extLst>
         </p:spPr>
@@ -7100,7 +7145,7 @@
           </a:prstGeom>
           <a:extLst>
             <a:ext uri="{C572A759-6A51-4108-AA02-DFA0A04FC94B}">
-              <ma14:wrappingTextBoxFlag xmlns="" xmlns:ma14="http://schemas.microsoft.com/office/mac/drawingml/2011/main" val="0"/>
+              <ma14:wrappingTextBoxFlag xmlns:ma14="http://schemas.microsoft.com/office/mac/drawingml/2011/main" xmlns="" val="0"/>
             </a:ext>
           </a:extLst>
         </p:spPr>
@@ -7275,7 +7320,7 @@
         </p:nvSpPr>
         <p:spPr>
           <a:xfrm>
-            <a:off x="987552" y="2194560"/>
+            <a:off x="978408" y="1950800"/>
             <a:ext cx="4315968" cy="1554480"/>
           </a:xfrm>
           <a:prstGeom prst="rect">
@@ -7300,7 +7345,7 @@
                   <a:srgbClr val="0E2230"/>
                 </a:solidFill>
               </a:rPr>
-              <a:t>A complete single-page browser game with desktop and mobile support.</a:t>
+              <a:t>Single-page browser game, desktop + mobile.</a:t>
             </a:r>
             <a:endParaRPr lang="en-US" sz="1400" dirty="0"/>
           </a:p>
@@ -7315,7 +7360,7 @@
                   <a:srgbClr val="0E2230"/>
                 </a:solidFill>
               </a:rPr>
-              <a:t>Six main cipher rooms plus a hidden final challenge.</a:t>
+              <a:t>Six rooms plus one hidden final room.</a:t>
             </a:r>
             <a:endParaRPr lang="en-US" sz="1400" dirty="0"/>
           </a:p>
@@ -7330,7 +7375,7 @@
                   <a:srgbClr val="0E2230"/>
                 </a:solidFill>
               </a:rPr>
-              <a:t>Cybersecurity concepts presented through gameplay.</a:t>
+              <a:t>Security concepts taught through gameplay.</a:t>
             </a:r>
             <a:endParaRPr lang="en-US" sz="1400" dirty="0"/>
           </a:p>
@@ -7441,7 +7486,7 @@
         </p:nvSpPr>
         <p:spPr>
           <a:xfrm>
-            <a:off x="6778752" y="2350008"/>
+            <a:off x="6778752" y="2061972"/>
             <a:ext cx="4297680" cy="909828"/>
           </a:xfrm>
           <a:prstGeom prst="rect">
@@ -7456,16 +7501,13 @@
           </a:bodyPr>
           <a:lstStyle/>
           <a:p>
-            <a:pPr marL="0" indent="0">
-              <a:buNone/>
-            </a:pPr>
             <a:r>
               <a:rPr lang="en-US" sz="1400" dirty="0">
                 <a:solidFill>
                   <a:srgbClr val="0E2230"/>
                 </a:solidFill>
               </a:rPr>
-              <a:t>The project is ready because it has fully deployed gameplay mechanics, visible systems, balanced values that fits casual gamers, and a direct connection between cryptography and game mechanics.</a:t>
+              <a:t>Fully deployed, desktop and mobile ready.</a:t>
             </a:r>
             <a:endParaRPr lang="en-US" sz="1400" dirty="0"/>
           </a:p>
@@ -7575,7 +7617,7 @@
           </a:prstGeom>
           <a:extLst>
             <a:ext uri="{C572A759-6A51-4108-AA02-DFA0A04FC94B}">
-              <ma14:wrappingTextBoxFlag xmlns="" xmlns:ma14="http://schemas.microsoft.com/office/mac/drawingml/2011/main" val="0"/>
+              <ma14:wrappingTextBoxFlag xmlns:ma14="http://schemas.microsoft.com/office/mac/drawingml/2011/main" xmlns="" val="0"/>
             </a:ext>
           </a:extLst>
         </p:spPr>

--- a/Cipher_Breach_Presentation.pptx
+++ b/Cipher_Breach_Presentation.pptx
@@ -128,6 +128,1016 @@
     </p:ext>
   </p:extLst>
 </p:presentation>
+</file>
+
+<file path=ppt/charts/chart1.xml><?xml version="1.0" encoding="utf-8"?>
+<c:chartSpace xmlns:c="http://schemas.openxmlformats.org/drawingml/2006/chart" xmlns:a="http://schemas.openxmlformats.org/drawingml/2006/main" xmlns:r="http://schemas.openxmlformats.org/officeDocument/2006/relationships" xmlns:c16r2="http://schemas.microsoft.com/office/drawing/2015/06/chart">
+  <c:date1904 val="0"/>
+  <c:lang val="en-US"/>
+  <c:roundedCorners val="0"/>
+  <mc:AlternateContent xmlns:mc="http://schemas.openxmlformats.org/markup-compatibility/2006">
+    <mc:Choice xmlns:c14="http://schemas.microsoft.com/office/drawing/2007/8/2/chart" Requires="c14">
+      <c14:style val="102"/>
+    </mc:Choice>
+    <mc:Fallback>
+      <c:style val="2"/>
+    </mc:Fallback>
+  </mc:AlternateContent>
+  <c:chart>
+    <c:autoTitleDeleted val="1"/>
+    <c:plotArea>
+      <c:layout/>
+      <c:pieChart>
+        <c:varyColors val="1"/>
+        <c:ser>
+          <c:idx val="0"/>
+          <c:order val="0"/>
+          <c:tx>
+            <c:strRef>
+              <c:f>Sheet1!$B$1</c:f>
+              <c:strCache>
+                <c:ptCount val="1"/>
+                <c:pt idx="0">
+                  <c:v>Sales</c:v>
+                </c:pt>
+              </c:strCache>
+            </c:strRef>
+          </c:tx>
+          <c:dPt>
+            <c:idx val="0"/>
+            <c:bubble3D val="0"/>
+            <c:spPr>
+              <a:solidFill>
+                <a:schemeClr val="accent1"/>
+              </a:solidFill>
+              <a:ln>
+                <a:noFill/>
+              </a:ln>
+              <a:effectLst/>
+              <a:scene3d>
+                <a:camera prst="orthographicFront"/>
+                <a:lightRig rig="brightRoom" dir="t"/>
+              </a:scene3d>
+              <a:sp3d prstMaterial="flat">
+                <a:bevelT w="50800" h="101600" prst="angle"/>
+                <a:contourClr>
+                  <a:srgbClr val="000000"/>
+                </a:contourClr>
+              </a:sp3d>
+            </c:spPr>
+            <c:extLst>
+              <c:ext xmlns:c16="http://schemas.microsoft.com/office/drawing/2014/chart" uri="{C3380CC4-5D6E-409C-BE32-E72D297353CC}">
+                <c16:uniqueId val="{00000002-A39E-4D23-ADA6-F9E881CFD037}"/>
+              </c:ext>
+            </c:extLst>
+          </c:dPt>
+          <c:dPt>
+            <c:idx val="1"/>
+            <c:bubble3D val="0"/>
+            <c:spPr>
+              <a:solidFill>
+                <a:srgbClr val="E34C26"/>
+              </a:solidFill>
+              <a:ln>
+                <a:noFill/>
+              </a:ln>
+              <a:effectLst/>
+              <a:scene3d>
+                <a:camera prst="orthographicFront"/>
+                <a:lightRig rig="brightRoom" dir="t"/>
+              </a:scene3d>
+              <a:sp3d prstMaterial="flat">
+                <a:bevelT w="50800" h="101600" prst="angle"/>
+                <a:contourClr>
+                  <a:srgbClr val="000000"/>
+                </a:contourClr>
+              </a:sp3d>
+            </c:spPr>
+            <c:extLst>
+              <c:ext xmlns:c16="http://schemas.microsoft.com/office/drawing/2014/chart" uri="{C3380CC4-5D6E-409C-BE32-E72D297353CC}">
+                <c16:uniqueId val="{00000004-A39E-4D23-ADA6-F9E881CFD037}"/>
+              </c:ext>
+            </c:extLst>
+          </c:dPt>
+          <c:dPt>
+            <c:idx val="2"/>
+            <c:bubble3D val="0"/>
+            <c:spPr>
+              <a:solidFill>
+                <a:srgbClr val="F1E05A"/>
+              </a:solidFill>
+              <a:ln>
+                <a:noFill/>
+              </a:ln>
+              <a:effectLst/>
+              <a:scene3d>
+                <a:camera prst="orthographicFront"/>
+                <a:lightRig rig="brightRoom" dir="t"/>
+              </a:scene3d>
+              <a:sp3d prstMaterial="flat">
+                <a:bevelT w="50800" h="101600" prst="angle"/>
+                <a:contourClr>
+                  <a:srgbClr val="000000"/>
+                </a:contourClr>
+              </a:sp3d>
+            </c:spPr>
+            <c:extLst>
+              <c:ext xmlns:c16="http://schemas.microsoft.com/office/drawing/2014/chart" uri="{C3380CC4-5D6E-409C-BE32-E72D297353CC}">
+                <c16:uniqueId val="{00000003-A39E-4D23-ADA6-F9E881CFD037}"/>
+              </c:ext>
+            </c:extLst>
+          </c:dPt>
+          <c:dPt>
+            <c:idx val="3"/>
+            <c:bubble3D val="0"/>
+            <c:spPr>
+              <a:solidFill>
+                <a:schemeClr val="accent4"/>
+              </a:solidFill>
+              <a:ln>
+                <a:noFill/>
+              </a:ln>
+              <a:effectLst/>
+              <a:scene3d>
+                <a:camera prst="orthographicFront"/>
+                <a:lightRig rig="brightRoom" dir="t"/>
+              </a:scene3d>
+              <a:sp3d prstMaterial="flat">
+                <a:bevelT w="50800" h="101600" prst="angle"/>
+                <a:contourClr>
+                  <a:srgbClr val="000000"/>
+                </a:contourClr>
+              </a:sp3d>
+            </c:spPr>
+          </c:dPt>
+          <c:dLbls>
+            <c:dLbl>
+              <c:idx val="0"/>
+              <c:tx>
+                <c:rich>
+                  <a:bodyPr/>
+                  <a:lstStyle/>
+                  <a:p>
+                    <a:fld id="{785213D9-5CEF-4BC5-9B2F-59526F7719C5}" type="PERCENTAGE">
+                      <a:rPr lang="en-US">
+                        <a:solidFill>
+                          <a:schemeClr val="bg1">
+                            <a:lumMod val="95000"/>
+                          </a:schemeClr>
+                        </a:solidFill>
+                      </a:rPr>
+                      <a:pPr/>
+                      <a:t>[PERCENTAGE]</a:t>
+                    </a:fld>
+                    <a:endParaRPr lang="en-US"/>
+                  </a:p>
+                </c:rich>
+              </c:tx>
+              <c:dLblPos val="inEnd"/>
+              <c:showLegendKey val="0"/>
+              <c:showVal val="0"/>
+              <c:showCatName val="0"/>
+              <c:showSerName val="0"/>
+              <c:showPercent val="1"/>
+              <c:showBubbleSize val="0"/>
+              <c:extLst>
+                <c:ext xmlns:c15="http://schemas.microsoft.com/office/drawing/2012/chart" uri="{CE6537A1-D6FC-4f65-9D91-7224C49458BB}">
+                  <c15:dlblFieldTable/>
+                  <c15:showDataLabelsRange val="0"/>
+                </c:ext>
+                <c:ext xmlns:c16="http://schemas.microsoft.com/office/drawing/2014/chart" uri="{C3380CC4-5D6E-409C-BE32-E72D297353CC}">
+                  <c16:uniqueId val="{00000002-A39E-4D23-ADA6-F9E881CFD037}"/>
+                </c:ext>
+              </c:extLst>
+            </c:dLbl>
+            <c:dLbl>
+              <c:idx val="2"/>
+              <c:layout>
+                <c:manualLayout>
+                  <c:x val="0.11570352494280922"/>
+                  <c:y val="-0.27447412422690015"/>
+                </c:manualLayout>
+              </c:layout>
+              <c:tx>
+                <c:rich>
+                  <a:bodyPr rot="0" spcFirstLastPara="1" vertOverflow="ellipsis" vert="horz" wrap="square" lIns="38100" tIns="19050" rIns="38100" bIns="19050" anchor="ctr" anchorCtr="1">
+                    <a:spAutoFit/>
+                  </a:bodyPr>
+                  <a:lstStyle/>
+                  <a:p>
+                    <a:pPr>
+                      <a:defRPr sz="1197" b="1" i="0" u="none" strike="noStrike" kern="1200" baseline="0">
+                        <a:solidFill>
+                          <a:schemeClr val="lt1"/>
+                        </a:solidFill>
+                        <a:latin typeface="+mn-lt"/>
+                        <a:ea typeface="+mn-ea"/>
+                        <a:cs typeface="+mn-cs"/>
+                      </a:defRPr>
+                    </a:pPr>
+                    <a:fld id="{8E3E4ED5-9DE2-41DE-A2E8-302FC5556CFE}" type="PERCENTAGE">
+                      <a:rPr lang="en-US">
+                        <a:solidFill>
+                          <a:schemeClr val="bg2">
+                            <a:lumMod val="10000"/>
+                          </a:schemeClr>
+                        </a:solidFill>
+                      </a:rPr>
+                      <a:pPr>
+                        <a:defRPr/>
+                      </a:pPr>
+                      <a:t>[PERCENTAGE]</a:t>
+                    </a:fld>
+                    <a:endParaRPr lang="en-US"/>
+                  </a:p>
+                </c:rich>
+              </c:tx>
+              <c:spPr>
+                <a:noFill/>
+                <a:ln>
+                  <a:noFill/>
+                </a:ln>
+                <a:effectLst>
+                  <a:glow rad="25400">
+                    <a:schemeClr val="accent1">
+                      <a:alpha val="40000"/>
+                    </a:schemeClr>
+                  </a:glow>
+                </a:effectLst>
+              </c:spPr>
+              <c:txPr>
+                <a:bodyPr rot="0" spcFirstLastPara="1" vertOverflow="ellipsis" vert="horz" wrap="square" lIns="38100" tIns="19050" rIns="38100" bIns="19050" anchor="ctr" anchorCtr="1">
+                  <a:spAutoFit/>
+                </a:bodyPr>
+                <a:lstStyle/>
+                <a:p>
+                  <a:pPr>
+                    <a:defRPr sz="1197" b="1" i="0" u="none" strike="noStrike" kern="1200" baseline="0">
+                      <a:solidFill>
+                        <a:schemeClr val="lt1"/>
+                      </a:solidFill>
+                      <a:latin typeface="+mn-lt"/>
+                      <a:ea typeface="+mn-ea"/>
+                      <a:cs typeface="+mn-cs"/>
+                    </a:defRPr>
+                  </a:pPr>
+                  <a:endParaRPr lang="en-US"/>
+                </a:p>
+              </c:txPr>
+              <c:dLblPos val="bestFit"/>
+              <c:showLegendKey val="0"/>
+              <c:showVal val="0"/>
+              <c:showCatName val="0"/>
+              <c:showSerName val="0"/>
+              <c:showPercent val="1"/>
+              <c:showBubbleSize val="0"/>
+              <c:extLst>
+                <c:ext xmlns:c15="http://schemas.microsoft.com/office/drawing/2012/chart" uri="{CE6537A1-D6FC-4f65-9D91-7224C49458BB}">
+                  <c15:dlblFieldTable/>
+                  <c15:showDataLabelsRange val="0"/>
+                </c:ext>
+                <c:ext xmlns:c16="http://schemas.microsoft.com/office/drawing/2014/chart" uri="{C3380CC4-5D6E-409C-BE32-E72D297353CC}">
+                  <c16:uniqueId val="{00000003-A39E-4D23-ADA6-F9E881CFD037}"/>
+                </c:ext>
+              </c:extLst>
+            </c:dLbl>
+            <c:spPr>
+              <a:noFill/>
+              <a:ln>
+                <a:noFill/>
+              </a:ln>
+              <a:effectLst/>
+            </c:spPr>
+            <c:txPr>
+              <a:bodyPr rot="0" spcFirstLastPara="1" vertOverflow="ellipsis" vert="horz" wrap="square" lIns="38100" tIns="19050" rIns="38100" bIns="19050" anchor="ctr" anchorCtr="1">
+                <a:spAutoFit/>
+              </a:bodyPr>
+              <a:lstStyle/>
+              <a:p>
+                <a:pPr>
+                  <a:defRPr sz="1197" b="1" i="0" u="none" strike="noStrike" kern="1200" baseline="0">
+                    <a:solidFill>
+                      <a:schemeClr val="lt1"/>
+                    </a:solidFill>
+                    <a:latin typeface="+mn-lt"/>
+                    <a:ea typeface="+mn-ea"/>
+                    <a:cs typeface="+mn-cs"/>
+                  </a:defRPr>
+                </a:pPr>
+                <a:endParaRPr lang="en-US"/>
+              </a:p>
+            </c:txPr>
+            <c:dLblPos val="inEnd"/>
+            <c:showLegendKey val="0"/>
+            <c:showVal val="0"/>
+            <c:showCatName val="0"/>
+            <c:showSerName val="0"/>
+            <c:showPercent val="1"/>
+            <c:showBubbleSize val="0"/>
+            <c:showLeaderLines val="1"/>
+            <c:leaderLines>
+              <c:spPr>
+                <a:ln w="9525" cap="flat" cmpd="sng" algn="ctr">
+                  <a:solidFill>
+                    <a:schemeClr val="tx1">
+                      <a:lumMod val="35000"/>
+                      <a:lumOff val="65000"/>
+                    </a:schemeClr>
+                  </a:solidFill>
+                  <a:round/>
+                </a:ln>
+                <a:effectLst/>
+              </c:spPr>
+            </c:leaderLines>
+            <c:extLst>
+              <c:ext xmlns:c15="http://schemas.microsoft.com/office/drawing/2012/chart" uri="{CE6537A1-D6FC-4f65-9D91-7224C49458BB}"/>
+            </c:extLst>
+          </c:dLbls>
+          <c:cat>
+            <c:strRef>
+              <c:f>Sheet1!$A$2:$A$5</c:f>
+              <c:strCache>
+                <c:ptCount val="3"/>
+                <c:pt idx="0">
+                  <c:v>CSS</c:v>
+                </c:pt>
+                <c:pt idx="1">
+                  <c:v>HTML</c:v>
+                </c:pt>
+                <c:pt idx="2">
+                  <c:v>JS</c:v>
+                </c:pt>
+              </c:strCache>
+            </c:strRef>
+          </c:cat>
+          <c:val>
+            <c:numRef>
+              <c:f>Sheet1!$B$2:$B$5</c:f>
+              <c:numCache>
+                <c:formatCode>General</c:formatCode>
+                <c:ptCount val="4"/>
+                <c:pt idx="0">
+                  <c:v>10.3</c:v>
+                </c:pt>
+                <c:pt idx="1">
+                  <c:v>3.2</c:v>
+                </c:pt>
+                <c:pt idx="2">
+                  <c:v>86.5</c:v>
+                </c:pt>
+              </c:numCache>
+            </c:numRef>
+          </c:val>
+          <c:extLst>
+            <c:ext xmlns:c16="http://schemas.microsoft.com/office/drawing/2014/chart" uri="{C3380CC4-5D6E-409C-BE32-E72D297353CC}">
+              <c16:uniqueId val="{00000000-A39E-4D23-ADA6-F9E881CFD037}"/>
+            </c:ext>
+          </c:extLst>
+        </c:ser>
+        <c:dLbls>
+          <c:dLblPos val="inEnd"/>
+          <c:showLegendKey val="0"/>
+          <c:showVal val="0"/>
+          <c:showCatName val="0"/>
+          <c:showSerName val="0"/>
+          <c:showPercent val="1"/>
+          <c:showBubbleSize val="0"/>
+          <c:showLeaderLines val="1"/>
+        </c:dLbls>
+        <c:firstSliceAng val="0"/>
+      </c:pieChart>
+      <c:spPr>
+        <a:noFill/>
+        <a:ln>
+          <a:noFill/>
+        </a:ln>
+        <a:effectLst/>
+      </c:spPr>
+    </c:plotArea>
+    <c:legend>
+      <c:legendPos val="t"/>
+      <c:legendEntry>
+        <c:idx val="3"/>
+        <c:delete val="1"/>
+      </c:legendEntry>
+      <c:overlay val="0"/>
+      <c:spPr>
+        <a:noFill/>
+        <a:ln>
+          <a:noFill/>
+        </a:ln>
+        <a:effectLst/>
+      </c:spPr>
+      <c:txPr>
+        <a:bodyPr rot="0" spcFirstLastPara="1" vertOverflow="ellipsis" vert="horz" wrap="square" anchor="ctr" anchorCtr="1"/>
+        <a:lstStyle/>
+        <a:p>
+          <a:pPr>
+            <a:defRPr sz="1197" b="0" i="0" u="none" strike="noStrike" kern="1200" baseline="0">
+              <a:solidFill>
+                <a:schemeClr val="tx1">
+                  <a:lumMod val="65000"/>
+                  <a:lumOff val="35000"/>
+                </a:schemeClr>
+              </a:solidFill>
+              <a:latin typeface="+mn-lt"/>
+              <a:ea typeface="+mn-ea"/>
+              <a:cs typeface="+mn-cs"/>
+            </a:defRPr>
+          </a:pPr>
+          <a:endParaRPr lang="en-US"/>
+        </a:p>
+      </c:txPr>
+    </c:legend>
+    <c:plotVisOnly val="1"/>
+    <c:dispBlanksAs val="gap"/>
+    <c:showDLblsOverMax val="0"/>
+    <c:extLst>
+      <c:ext xmlns:c16r3="http://schemas.microsoft.com/office/drawing/2017/03/chart" uri="{56B9EC1D-385E-4148-901F-78D8002777C0}">
+        <c16r3:dataDisplayOptions16>
+          <c16r3:dispNaAsBlank val="1"/>
+        </c16r3:dataDisplayOptions16>
+      </c:ext>
+    </c:extLst>
+  </c:chart>
+  <c:spPr>
+    <a:noFill/>
+    <a:ln>
+      <a:noFill/>
+    </a:ln>
+    <a:effectLst/>
+  </c:spPr>
+  <c:txPr>
+    <a:bodyPr/>
+    <a:lstStyle/>
+    <a:p>
+      <a:pPr>
+        <a:defRPr/>
+      </a:pPr>
+      <a:endParaRPr lang="en-US"/>
+    </a:p>
+  </c:txPr>
+  <c:externalData r:id="rId3">
+    <c:autoUpdate val="0"/>
+  </c:externalData>
+</c:chartSpace>
+</file>
+
+<file path=ppt/charts/colors1.xml><?xml version="1.0" encoding="utf-8"?>
+<cs:colorStyle xmlns:cs="http://schemas.microsoft.com/office/drawing/2012/chartStyle" xmlns:a="http://schemas.openxmlformats.org/drawingml/2006/main" meth="cycle" id="10">
+  <a:schemeClr val="accent1"/>
+  <a:schemeClr val="accent2"/>
+  <a:schemeClr val="accent3"/>
+  <a:schemeClr val="accent4"/>
+  <a:schemeClr val="accent5"/>
+  <a:schemeClr val="accent6"/>
+  <cs:variation/>
+  <cs:variation>
+    <a:lumMod val="60000"/>
+  </cs:variation>
+  <cs:variation>
+    <a:lumMod val="80000"/>
+    <a:lumOff val="20000"/>
+  </cs:variation>
+  <cs:variation>
+    <a:lumMod val="80000"/>
+  </cs:variation>
+  <cs:variation>
+    <a:lumMod val="60000"/>
+    <a:lumOff val="40000"/>
+  </cs:variation>
+  <cs:variation>
+    <a:lumMod val="50000"/>
+  </cs:variation>
+  <cs:variation>
+    <a:lumMod val="70000"/>
+    <a:lumOff val="30000"/>
+  </cs:variation>
+  <cs:variation>
+    <a:lumMod val="70000"/>
+  </cs:variation>
+  <cs:variation>
+    <a:lumMod val="50000"/>
+    <a:lumOff val="50000"/>
+  </cs:variation>
+</cs:colorStyle>
+</file>
+
+<file path=ppt/charts/style1.xml><?xml version="1.0" encoding="utf-8"?>
+<cs:chartStyle xmlns:cs="http://schemas.microsoft.com/office/drawing/2012/chartStyle" xmlns:a="http://schemas.openxmlformats.org/drawingml/2006/main" id="258">
+  <cs:axisTitle>
+    <cs:lnRef idx="0"/>
+    <cs:fillRef idx="0"/>
+    <cs:effectRef idx="0"/>
+    <cs:fontRef idx="minor">
+      <a:schemeClr val="tx1">
+        <a:lumMod val="65000"/>
+        <a:lumOff val="35000"/>
+      </a:schemeClr>
+    </cs:fontRef>
+    <cs:defRPr sz="1197" kern="1200"/>
+  </cs:axisTitle>
+  <cs:categoryAxis>
+    <cs:lnRef idx="0"/>
+    <cs:fillRef idx="0"/>
+    <cs:effectRef idx="0"/>
+    <cs:fontRef idx="minor">
+      <a:schemeClr val="tx1">
+        <a:lumMod val="65000"/>
+        <a:lumOff val="35000"/>
+      </a:schemeClr>
+    </cs:fontRef>
+    <cs:defRPr sz="1197" kern="1200"/>
+  </cs:categoryAxis>
+  <cs:chartArea mods="allowNoFillOverride allowNoLineOverride">
+    <cs:lnRef idx="0"/>
+    <cs:fillRef idx="0"/>
+    <cs:effectRef idx="0"/>
+    <cs:fontRef idx="minor">
+      <a:schemeClr val="tx1"/>
+    </cs:fontRef>
+    <cs:spPr>
+      <a:solidFill>
+        <a:schemeClr val="bg1"/>
+      </a:solidFill>
+      <a:ln w="9525" cap="flat" cmpd="sng" algn="ctr">
+        <a:solidFill>
+          <a:schemeClr val="tx1">
+            <a:lumMod val="15000"/>
+            <a:lumOff val="85000"/>
+          </a:schemeClr>
+        </a:solidFill>
+        <a:round/>
+      </a:ln>
+    </cs:spPr>
+    <cs:defRPr sz="1197" kern="1200"/>
+  </cs:chartArea>
+  <cs:dataLabel>
+    <cs:lnRef idx="0"/>
+    <cs:fillRef idx="0"/>
+    <cs:effectRef idx="0"/>
+    <cs:fontRef idx="minor">
+      <a:schemeClr val="lt1"/>
+    </cs:fontRef>
+    <cs:defRPr sz="1197" b="1" kern="1200"/>
+  </cs:dataLabel>
+  <cs:dataLabelCallout>
+    <cs:lnRef idx="0"/>
+    <cs:fillRef idx="0"/>
+    <cs:effectRef idx="0"/>
+    <cs:fontRef idx="minor">
+      <a:schemeClr val="dk1">
+        <a:lumMod val="65000"/>
+        <a:lumOff val="35000"/>
+      </a:schemeClr>
+    </cs:fontRef>
+    <cs:spPr>
+      <a:solidFill>
+        <a:schemeClr val="lt1"/>
+      </a:solidFill>
+      <a:ln>
+        <a:solidFill>
+          <a:schemeClr val="dk1">
+            <a:lumMod val="25000"/>
+            <a:lumOff val="75000"/>
+          </a:schemeClr>
+        </a:solidFill>
+      </a:ln>
+    </cs:spPr>
+    <cs:defRPr sz="1197" kern="1200"/>
+    <cs:bodyPr rot="0" spcFirstLastPara="1" vertOverflow="clip" horzOverflow="clip" vert="horz" wrap="square" lIns="36576" tIns="18288" rIns="36576" bIns="18288" anchor="ctr" anchorCtr="1">
+      <a:spAutoFit/>
+    </cs:bodyPr>
+  </cs:dataLabelCallout>
+  <cs:dataPoint>
+    <cs:lnRef idx="0"/>
+    <cs:fillRef idx="0">
+      <cs:styleClr val="auto"/>
+    </cs:fillRef>
+    <cs:effectRef idx="0"/>
+    <cs:fontRef idx="minor">
+      <a:schemeClr val="tx1"/>
+    </cs:fontRef>
+    <cs:spPr>
+      <a:solidFill>
+        <a:schemeClr val="phClr"/>
+      </a:solidFill>
+      <a:scene3d>
+        <a:camera prst="orthographicFront"/>
+        <a:lightRig rig="brightRoom" dir="t"/>
+      </a:scene3d>
+      <a:sp3d prstMaterial="flat">
+        <a:bevelT w="50800" h="101600" prst="angle"/>
+        <a:contourClr>
+          <a:srgbClr val="000000"/>
+        </a:contourClr>
+      </a:sp3d>
+    </cs:spPr>
+  </cs:dataPoint>
+  <cs:dataPoint3D>
+    <cs:lnRef idx="0"/>
+    <cs:fillRef idx="0">
+      <cs:styleClr val="auto"/>
+    </cs:fillRef>
+    <cs:effectRef idx="0"/>
+    <cs:fontRef idx="minor">
+      <a:schemeClr val="tx1"/>
+    </cs:fontRef>
+    <cs:spPr>
+      <a:solidFill>
+        <a:schemeClr val="phClr"/>
+      </a:solidFill>
+      <a:ln w="19050">
+        <a:solidFill>
+          <a:schemeClr val="lt1"/>
+        </a:solidFill>
+      </a:ln>
+    </cs:spPr>
+  </cs:dataPoint3D>
+  <cs:dataPointLine>
+    <cs:lnRef idx="0">
+      <cs:styleClr val="auto"/>
+    </cs:lnRef>
+    <cs:fillRef idx="0"/>
+    <cs:effectRef idx="0"/>
+    <cs:fontRef idx="minor">
+      <a:schemeClr val="tx1"/>
+    </cs:fontRef>
+    <cs:spPr>
+      <a:ln w="28575" cap="rnd">
+        <a:solidFill>
+          <a:schemeClr val="phClr"/>
+        </a:solidFill>
+        <a:round/>
+      </a:ln>
+    </cs:spPr>
+  </cs:dataPointLine>
+  <cs:dataPointMarker>
+    <cs:lnRef idx="0"/>
+    <cs:fillRef idx="0">
+      <cs:styleClr val="auto"/>
+    </cs:fillRef>
+    <cs:effectRef idx="0"/>
+    <cs:fontRef idx="minor">
+      <a:schemeClr val="tx1"/>
+    </cs:fontRef>
+    <cs:spPr>
+      <a:solidFill>
+        <a:schemeClr val="phClr"/>
+      </a:solidFill>
+      <a:ln w="9525">
+        <a:solidFill>
+          <a:schemeClr val="lt1"/>
+        </a:solidFill>
+      </a:ln>
+    </cs:spPr>
+  </cs:dataPointMarker>
+  <cs:dataPointMarkerLayout symbol="circle" size="6"/>
+  <cs:dataPointWireframe>
+    <cs:lnRef idx="0">
+      <cs:styleClr val="auto"/>
+    </cs:lnRef>
+    <cs:fillRef idx="0"/>
+    <cs:effectRef idx="0"/>
+    <cs:fontRef idx="minor">
+      <a:schemeClr val="tx1"/>
+    </cs:fontRef>
+    <cs:spPr>
+      <a:ln w="9525" cap="rnd">
+        <a:solidFill>
+          <a:schemeClr val="phClr"/>
+        </a:solidFill>
+        <a:round/>
+      </a:ln>
+    </cs:spPr>
+  </cs:dataPointWireframe>
+  <cs:dataTable>
+    <cs:lnRef idx="0"/>
+    <cs:fillRef idx="0"/>
+    <cs:effectRef idx="0"/>
+    <cs:fontRef idx="minor">
+      <a:schemeClr val="tx1">
+        <a:lumMod val="65000"/>
+        <a:lumOff val="35000"/>
+      </a:schemeClr>
+    </cs:fontRef>
+    <cs:spPr>
+      <a:noFill/>
+      <a:ln w="9525" cap="flat" cmpd="sng" algn="ctr">
+        <a:solidFill>
+          <a:schemeClr val="tx1">
+            <a:lumMod val="15000"/>
+            <a:lumOff val="85000"/>
+          </a:schemeClr>
+        </a:solidFill>
+        <a:round/>
+      </a:ln>
+    </cs:spPr>
+    <cs:defRPr sz="1197" kern="1200"/>
+  </cs:dataTable>
+  <cs:downBar>
+    <cs:lnRef idx="0"/>
+    <cs:fillRef idx="0"/>
+    <cs:effectRef idx="0"/>
+    <cs:fontRef idx="minor">
+      <a:schemeClr val="tx1"/>
+    </cs:fontRef>
+    <cs:spPr>
+      <a:solidFill>
+        <a:schemeClr val="dk1">
+          <a:lumMod val="75000"/>
+          <a:lumOff val="25000"/>
+        </a:schemeClr>
+      </a:solidFill>
+      <a:ln w="9525" cap="flat" cmpd="sng" algn="ctr">
+        <a:solidFill>
+          <a:schemeClr val="tx1">
+            <a:lumMod val="65000"/>
+            <a:lumOff val="35000"/>
+          </a:schemeClr>
+        </a:solidFill>
+        <a:round/>
+      </a:ln>
+    </cs:spPr>
+  </cs:downBar>
+  <cs:dropLine>
+    <cs:lnRef idx="0"/>
+    <cs:fillRef idx="0"/>
+    <cs:effectRef idx="0"/>
+    <cs:fontRef idx="minor">
+      <a:schemeClr val="tx1"/>
+    </cs:fontRef>
+    <cs:spPr>
+      <a:ln w="9525" cap="flat" cmpd="sng" algn="ctr">
+        <a:solidFill>
+          <a:schemeClr val="tx1">
+            <a:lumMod val="35000"/>
+            <a:lumOff val="65000"/>
+          </a:schemeClr>
+        </a:solidFill>
+        <a:round/>
+      </a:ln>
+    </cs:spPr>
+  </cs:dropLine>
+  <cs:errorBar>
+    <cs:lnRef idx="0"/>
+    <cs:fillRef idx="0"/>
+    <cs:effectRef idx="0"/>
+    <cs:fontRef idx="minor">
+      <a:schemeClr val="tx1"/>
+    </cs:fontRef>
+    <cs:spPr>
+      <a:ln w="9525" cap="flat" cmpd="sng" algn="ctr">
+        <a:solidFill>
+          <a:schemeClr val="tx1">
+            <a:lumMod val="65000"/>
+            <a:lumOff val="35000"/>
+          </a:schemeClr>
+        </a:solidFill>
+        <a:round/>
+      </a:ln>
+    </cs:spPr>
+  </cs:errorBar>
+  <cs:floor>
+    <cs:lnRef idx="0"/>
+    <cs:fillRef idx="0"/>
+    <cs:effectRef idx="0"/>
+    <cs:fontRef idx="minor">
+      <a:schemeClr val="tx1"/>
+    </cs:fontRef>
+    <cs:spPr>
+      <a:noFill/>
+      <a:ln>
+        <a:noFill/>
+      </a:ln>
+    </cs:spPr>
+  </cs:floor>
+  <cs:gridlineMajor>
+    <cs:lnRef idx="0"/>
+    <cs:fillRef idx="0"/>
+    <cs:effectRef idx="0"/>
+    <cs:fontRef idx="minor">
+      <a:schemeClr val="tx1"/>
+    </cs:fontRef>
+    <cs:spPr>
+      <a:ln w="9525" cap="flat" cmpd="sng" algn="ctr">
+        <a:solidFill>
+          <a:schemeClr val="tx1">
+            <a:lumMod val="15000"/>
+            <a:lumOff val="85000"/>
+          </a:schemeClr>
+        </a:solidFill>
+        <a:round/>
+      </a:ln>
+    </cs:spPr>
+  </cs:gridlineMajor>
+  <cs:gridlineMinor>
+    <cs:lnRef idx="0"/>
+    <cs:fillRef idx="0"/>
+    <cs:effectRef idx="0"/>
+    <cs:fontRef idx="minor">
+      <a:schemeClr val="tx1"/>
+    </cs:fontRef>
+    <cs:spPr>
+      <a:ln w="9525" cap="flat" cmpd="sng" algn="ctr">
+        <a:solidFill>
+          <a:schemeClr val="tx1">
+            <a:lumMod val="5000"/>
+            <a:lumOff val="95000"/>
+          </a:schemeClr>
+        </a:solidFill>
+        <a:round/>
+      </a:ln>
+    </cs:spPr>
+  </cs:gridlineMinor>
+  <cs:hiLoLine>
+    <cs:lnRef idx="0"/>
+    <cs:fillRef idx="0"/>
+    <cs:effectRef idx="0"/>
+    <cs:fontRef idx="minor">
+      <a:schemeClr val="tx1"/>
+    </cs:fontRef>
+    <cs:spPr>
+      <a:ln w="9525" cap="flat" cmpd="sng" algn="ctr">
+        <a:solidFill>
+          <a:schemeClr val="tx1">
+            <a:lumMod val="50000"/>
+            <a:lumOff val="50000"/>
+          </a:schemeClr>
+        </a:solidFill>
+        <a:round/>
+      </a:ln>
+    </cs:spPr>
+  </cs:hiLoLine>
+  <cs:leaderLine>
+    <cs:lnRef idx="0"/>
+    <cs:fillRef idx="0"/>
+    <cs:effectRef idx="0"/>
+    <cs:fontRef idx="minor">
+      <a:schemeClr val="tx1"/>
+    </cs:fontRef>
+    <cs:spPr>
+      <a:ln w="9525" cap="flat" cmpd="sng" algn="ctr">
+        <a:solidFill>
+          <a:schemeClr val="tx1">
+            <a:lumMod val="35000"/>
+            <a:lumOff val="65000"/>
+          </a:schemeClr>
+        </a:solidFill>
+        <a:round/>
+      </a:ln>
+    </cs:spPr>
+  </cs:leaderLine>
+  <cs:legend>
+    <cs:lnRef idx="0"/>
+    <cs:fillRef idx="0"/>
+    <cs:effectRef idx="0"/>
+    <cs:fontRef idx="minor">
+      <a:schemeClr val="tx1">
+        <a:lumMod val="65000"/>
+        <a:lumOff val="35000"/>
+      </a:schemeClr>
+    </cs:fontRef>
+    <cs:defRPr sz="1197" kern="1200"/>
+  </cs:legend>
+  <cs:plotArea mods="allowNoFillOverride allowNoLineOverride">
+    <cs:lnRef idx="0"/>
+    <cs:fillRef idx="0"/>
+    <cs:effectRef idx="0"/>
+    <cs:fontRef idx="minor">
+      <a:schemeClr val="tx1"/>
+    </cs:fontRef>
+  </cs:plotArea>
+  <cs:plotArea3D mods="allowNoFillOverride allowNoLineOverride">
+    <cs:lnRef idx="0"/>
+    <cs:fillRef idx="0"/>
+    <cs:effectRef idx="0"/>
+    <cs:fontRef idx="minor">
+      <a:schemeClr val="tx1"/>
+    </cs:fontRef>
+  </cs:plotArea3D>
+  <cs:seriesAxis>
+    <cs:lnRef idx="0"/>
+    <cs:fillRef idx="0"/>
+    <cs:effectRef idx="0"/>
+    <cs:fontRef idx="minor">
+      <a:schemeClr val="tx1">
+        <a:lumMod val="65000"/>
+        <a:lumOff val="35000"/>
+      </a:schemeClr>
+    </cs:fontRef>
+    <cs:defRPr sz="1197" kern="1200"/>
+  </cs:seriesAxis>
+  <cs:seriesLine>
+    <cs:lnRef idx="0"/>
+    <cs:fillRef idx="0"/>
+    <cs:effectRef idx="0"/>
+    <cs:fontRef idx="minor">
+      <a:schemeClr val="tx1"/>
+    </cs:fontRef>
+    <cs:spPr>
+      <a:ln w="9525" cap="flat" cmpd="sng" algn="ctr">
+        <a:solidFill>
+          <a:schemeClr val="tx1">
+            <a:lumMod val="35000"/>
+            <a:lumOff val="65000"/>
+          </a:schemeClr>
+        </a:solidFill>
+        <a:round/>
+      </a:ln>
+    </cs:spPr>
+  </cs:seriesLine>
+  <cs:title>
+    <cs:lnRef idx="0"/>
+    <cs:fillRef idx="0"/>
+    <cs:effectRef idx="0"/>
+    <cs:fontRef idx="minor">
+      <a:schemeClr val="tx1">
+        <a:lumMod val="65000"/>
+        <a:lumOff val="35000"/>
+      </a:schemeClr>
+    </cs:fontRef>
+    <cs:defRPr sz="1862" b="1" i="0" kern="1200" cap="all" spc="50" baseline="0"/>
+  </cs:title>
+  <cs:trendline>
+    <cs:lnRef idx="0">
+      <cs:styleClr val="auto"/>
+    </cs:lnRef>
+    <cs:fillRef idx="0"/>
+    <cs:effectRef idx="0"/>
+    <cs:fontRef idx="minor">
+      <a:schemeClr val="tx1"/>
+    </cs:fontRef>
+    <cs:spPr>
+      <a:ln w="19050" cap="rnd">
+        <a:solidFill>
+          <a:schemeClr val="phClr"/>
+        </a:solidFill>
+        <a:prstDash val="sysDash"/>
+      </a:ln>
+    </cs:spPr>
+  </cs:trendline>
+  <cs:trendlineLabel>
+    <cs:lnRef idx="0"/>
+    <cs:fillRef idx="0"/>
+    <cs:effectRef idx="0"/>
+    <cs:fontRef idx="minor">
+      <a:schemeClr val="tx1">
+        <a:lumMod val="65000"/>
+        <a:lumOff val="35000"/>
+      </a:schemeClr>
+    </cs:fontRef>
+    <cs:defRPr sz="1197" kern="1200"/>
+  </cs:trendlineLabel>
+  <cs:upBar>
+    <cs:lnRef idx="0"/>
+    <cs:fillRef idx="0"/>
+    <cs:effectRef idx="0"/>
+    <cs:fontRef idx="minor">
+      <a:schemeClr val="tx1"/>
+    </cs:fontRef>
+    <cs:spPr>
+      <a:solidFill>
+        <a:schemeClr val="lt1"/>
+      </a:solidFill>
+      <a:ln w="9525" cap="flat" cmpd="sng" algn="ctr">
+        <a:solidFill>
+          <a:schemeClr val="tx1">
+            <a:lumMod val="65000"/>
+            <a:lumOff val="35000"/>
+          </a:schemeClr>
+        </a:solidFill>
+        <a:round/>
+      </a:ln>
+    </cs:spPr>
+  </cs:upBar>
+  <cs:valueAxis>
+    <cs:lnRef idx="0"/>
+    <cs:fillRef idx="0"/>
+    <cs:effectRef idx="0"/>
+    <cs:fontRef idx="minor">
+      <a:schemeClr val="tx1">
+        <a:lumMod val="65000"/>
+        <a:lumOff val="35000"/>
+      </a:schemeClr>
+    </cs:fontRef>
+    <cs:defRPr sz="1197" kern="1200"/>
+  </cs:valueAxis>
+  <cs:wall>
+    <cs:lnRef idx="0"/>
+    <cs:fillRef idx="0"/>
+    <cs:effectRef idx="0"/>
+    <cs:fontRef idx="minor">
+      <a:schemeClr val="tx1"/>
+    </cs:fontRef>
+    <cs:spPr>
+      <a:noFill/>
+      <a:ln>
+        <a:noFill/>
+      </a:ln>
+    </cs:spPr>
+  </cs:wall>
+</cs:chartStyle>
 </file>
 
 <file path=ppt/notesMasters/notesMaster1.xml><?xml version="1.0" encoding="utf-8"?>
@@ -1192,7 +2202,7 @@
           </a:prstGeom>
           <a:extLst>
             <a:ext uri="{C572A759-6A51-4108-AA02-DFA0A04FC94B}">
-              <ma14:wrappingTextBoxFlag xmlns:ma14="http://schemas.microsoft.com/office/mac/drawingml/2011/main" xmlns="" val="0"/>
+              <ma14:wrappingTextBoxFlag xmlns="" xmlns:ma14="http://schemas.microsoft.com/office/mac/drawingml/2011/main" val="0"/>
             </a:ext>
           </a:extLst>
         </p:spPr>
@@ -1267,7 +2277,7 @@
           </a:prstGeom>
           <a:extLst>
             <a:ext uri="{C572A759-6A51-4108-AA02-DFA0A04FC94B}">
-              <ma14:wrappingTextBoxFlag xmlns:ma14="http://schemas.microsoft.com/office/mac/drawingml/2011/main" xmlns="" val="0"/>
+              <ma14:wrappingTextBoxFlag xmlns="" xmlns:ma14="http://schemas.microsoft.com/office/mac/drawingml/2011/main" val="0"/>
             </a:ext>
           </a:extLst>
         </p:spPr>
@@ -1292,6 +2302,45 @@
           </a:p>
         </p:txBody>
       </p:sp>
+      <p:cxnSp>
+        <p:nvCxnSpPr>
+          <p:cNvPr id="2" name="Straight Connector 1">
+            <a:extLst>
+              <a:ext uri="{FF2B5EF4-FFF2-40B4-BE49-F238E27FC236}">
+                <a16:creationId xmlns:a16="http://schemas.microsoft.com/office/drawing/2014/main" id="{0217E261-E24C-67A6-3557-0A33FEED0982}"/>
+              </a:ext>
+            </a:extLst>
+          </p:cNvPr>
+          <p:cNvCxnSpPr>
+            <a:cxnSpLocks/>
+          </p:cNvCxnSpPr>
+          <p:nvPr userDrawn="1"/>
+        </p:nvCxnSpPr>
+        <p:spPr>
+          <a:xfrm>
+            <a:off x="0" y="915047"/>
+            <a:ext cx="4553527" cy="0"/>
+          </a:xfrm>
+          <a:prstGeom prst="line">
+            <a:avLst/>
+          </a:prstGeom>
+          <a:ln w="76200"/>
+        </p:spPr>
+        <p:style>
+          <a:lnRef idx="1">
+            <a:schemeClr val="dk1"/>
+          </a:lnRef>
+          <a:fillRef idx="0">
+            <a:schemeClr val="dk1"/>
+          </a:fillRef>
+          <a:effectRef idx="0">
+            <a:schemeClr val="dk1"/>
+          </a:effectRef>
+          <a:fontRef idx="minor">
+            <a:schemeClr val="tx1"/>
+          </a:fontRef>
+        </p:style>
+      </p:cxnSp>
     </p:spTree>
   </p:cSld>
   <p:clrMap bg1="lt1" tx1="dk1" bg2="lt2" tx2="dk2" accent1="accent1" accent2="accent2" accent3="accent3" accent4="accent4" accent5="accent5" accent6="accent6" hlink="hlink" folHlink="folHlink"/>
@@ -1602,7 +2651,7 @@
           </a:prstGeom>
           <a:extLst>
             <a:ext uri="{C572A759-6A51-4108-AA02-DFA0A04FC94B}">
-              <ma14:wrappingTextBoxFlag xmlns:ma14="http://schemas.microsoft.com/office/mac/drawingml/2011/main" xmlns="" val="0"/>
+              <ma14:wrappingTextBoxFlag xmlns="" xmlns:ma14="http://schemas.microsoft.com/office/mac/drawingml/2011/main" val="0"/>
             </a:ext>
           </a:extLst>
         </p:spPr>
@@ -2406,8 +3455,8 @@
         </p:nvSpPr>
         <p:spPr>
           <a:xfrm>
-            <a:off x="566928" y="502920"/>
-            <a:ext cx="5029200" cy="411480"/>
+            <a:off x="585216" y="5728716"/>
+            <a:ext cx="2756131" cy="411480"/>
           </a:xfrm>
           <a:prstGeom prst="rect">
             <a:avLst/>
@@ -2476,8 +3525,8 @@
         </p:nvSpPr>
         <p:spPr>
           <a:xfrm>
-            <a:off x="566928" y="1216152"/>
-            <a:ext cx="5303520" cy="438912"/>
+            <a:off x="434340" y="502920"/>
+            <a:ext cx="2756131" cy="438912"/>
           </a:xfrm>
           <a:prstGeom prst="rect">
             <a:avLst/>
@@ -2679,8 +3728,8 @@
         </p:nvSpPr>
         <p:spPr>
           <a:xfrm>
-            <a:off x="713232" y="914400"/>
-            <a:ext cx="5120640" cy="640080"/>
+            <a:off x="713232" y="360819"/>
+            <a:ext cx="3563204" cy="640080"/>
           </a:xfrm>
           <a:prstGeom prst="rect">
             <a:avLst/>
@@ -3339,7 +4388,7 @@
           </a:prstGeom>
           <a:extLst>
             <a:ext uri="{C572A759-6A51-4108-AA02-DFA0A04FC94B}">
-              <ma14:wrappingTextBoxFlag xmlns:ma14="http://schemas.microsoft.com/office/mac/drawingml/2011/main" xmlns="" val="0"/>
+              <ma14:wrappingTextBoxFlag xmlns="" xmlns:ma14="http://schemas.microsoft.com/office/mac/drawingml/2011/main" val="0"/>
             </a:ext>
           </a:extLst>
         </p:spPr>
@@ -3451,8 +4500,8 @@
         </p:nvSpPr>
         <p:spPr>
           <a:xfrm>
-            <a:off x="749808" y="863145"/>
-            <a:ext cx="6583680" cy="438912"/>
+            <a:off x="1130247" y="424233"/>
+            <a:ext cx="2907792" cy="438912"/>
           </a:xfrm>
           <a:prstGeom prst="rect">
             <a:avLst/>
@@ -3979,7 +5028,7 @@
           </a:prstGeom>
           <a:extLst>
             <a:ext uri="{C572A759-6A51-4108-AA02-DFA0A04FC94B}">
-              <ma14:wrappingTextBoxFlag xmlns:ma14="http://schemas.microsoft.com/office/mac/drawingml/2011/main" xmlns="" val="0"/>
+              <ma14:wrappingTextBoxFlag xmlns="" xmlns:ma14="http://schemas.microsoft.com/office/mac/drawingml/2011/main" val="0"/>
             </a:ext>
           </a:extLst>
         </p:spPr>
@@ -5477,7 +6526,7 @@
           </a:prstGeom>
           <a:extLst>
             <a:ext uri="{C572A759-6A51-4108-AA02-DFA0A04FC94B}">
-              <ma14:wrappingTextBoxFlag xmlns:ma14="http://schemas.microsoft.com/office/mac/drawingml/2011/main" xmlns="" val="0"/>
+              <ma14:wrappingTextBoxFlag xmlns="" xmlns:ma14="http://schemas.microsoft.com/office/mac/drawingml/2011/main" val="0"/>
             </a:ext>
           </a:extLst>
         </p:spPr>
@@ -5833,7 +6882,7 @@
         </p:nvSpPr>
         <p:spPr>
           <a:xfrm>
-            <a:off x="749808" y="509959"/>
+            <a:off x="749808" y="436068"/>
             <a:ext cx="6583680" cy="438912"/>
           </a:xfrm>
           <a:prstGeom prst="rect">
@@ -6460,7 +7509,7 @@
           </a:prstGeom>
           <a:extLst>
             <a:ext uri="{C572A759-6A51-4108-AA02-DFA0A04FC94B}">
-              <ma14:wrappingTextBoxFlag xmlns:ma14="http://schemas.microsoft.com/office/mac/drawingml/2011/main" xmlns="" val="0"/>
+              <ma14:wrappingTextBoxFlag xmlns="" xmlns:ma14="http://schemas.microsoft.com/office/mac/drawingml/2011/main" val="0"/>
             </a:ext>
           </a:extLst>
         </p:spPr>
@@ -6496,6 +7545,14 @@
 <file path=ppt/slides/slide6.xml><?xml version="1.0" encoding="utf-8"?>
 <p:sld xmlns:a="http://schemas.openxmlformats.org/drawingml/2006/main" xmlns:r="http://schemas.openxmlformats.org/officeDocument/2006/relationships" xmlns:p="http://schemas.openxmlformats.org/presentationml/2006/main">
   <p:cSld name="Slide 5">
+    <p:bg>
+      <p:bgPr>
+        <a:solidFill>
+          <a:srgbClr val="F7FAFC"/>
+        </a:solidFill>
+        <a:effectLst/>
+      </p:bgPr>
+    </p:bg>
     <p:spTree>
       <p:nvGrpSpPr>
         <p:cNvPr id="1" name=""/>
@@ -6565,7 +7622,7 @@
         </p:blipFill>
         <p:spPr>
           <a:xfrm>
-            <a:off x="5989320" y="2045150"/>
+            <a:off x="5955792" y="411480"/>
             <a:ext cx="5486400" cy="3087741"/>
           </a:xfrm>
           <a:prstGeom prst="rect">
@@ -6581,50 +7638,14 @@
       </p:pic>
       <p:sp>
         <p:nvSpPr>
-          <p:cNvPr id="5" name="Text 2"/>
-          <p:cNvSpPr/>
-          <p:nvPr/>
-        </p:nvSpPr>
-        <p:spPr>
-          <a:xfrm>
-            <a:off x="749808" y="1234440"/>
-            <a:ext cx="1280160" cy="182880"/>
-          </a:xfrm>
-          <a:prstGeom prst="rect">
-            <a:avLst/>
-          </a:prstGeom>
-          <a:noFill/>
-          <a:ln/>
-        </p:spPr>
-        <p:txBody>
-          <a:bodyPr wrap="square" lIns="0" tIns="0" rIns="0" bIns="0" rtlCol="0" anchor="ctr"/>
-          <a:lstStyle/>
-          <a:p>
-            <a:pPr marL="0" indent="0">
-              <a:buNone/>
-            </a:pPr>
-            <a:r>
-              <a:rPr lang="en-US" sz="1600" b="1" dirty="0">
-                <a:solidFill>
-                  <a:srgbClr val="0F2233"/>
-                </a:solidFill>
-              </a:rPr>
-              <a:t>Main files</a:t>
-            </a:r>
-            <a:endParaRPr lang="en-US" sz="1600" dirty="0"/>
-          </a:p>
-        </p:txBody>
-      </p:sp>
-      <p:sp>
-        <p:nvSpPr>
           <p:cNvPr id="6" name="Text 3"/>
           <p:cNvSpPr/>
           <p:nvPr/>
         </p:nvSpPr>
         <p:spPr>
           <a:xfrm>
-            <a:off x="749808" y="1938528"/>
-            <a:ext cx="4663440" cy="2468880"/>
+            <a:off x="749808" y="3172968"/>
+            <a:ext cx="4663440" cy="1112705"/>
           </a:xfrm>
           <a:prstGeom prst="rect">
             <a:avLst/>
@@ -6705,7 +7726,7 @@
         </p:nvSpPr>
         <p:spPr>
           <a:xfrm>
-            <a:off x="749808" y="4357116"/>
+            <a:off x="7710321" y="5753793"/>
             <a:ext cx="2162068" cy="182880"/>
           </a:xfrm>
           <a:prstGeom prst="rect">
@@ -6730,328 +7751,6 @@
               <a:t>GitHub language split</a:t>
             </a:r>
             <a:endParaRPr lang="en-US" sz="1600" dirty="0"/>
-          </a:p>
-        </p:txBody>
-      </p:sp>
-      <p:sp>
-        <p:nvSpPr>
-          <p:cNvPr id="8" name="Shape 5"/>
-          <p:cNvSpPr/>
-          <p:nvPr/>
-        </p:nvSpPr>
-        <p:spPr>
-          <a:xfrm>
-            <a:off x="749808" y="4663440"/>
-            <a:ext cx="1188720" cy="685800"/>
-          </a:xfrm>
-          <a:prstGeom prst="roundRect">
-            <a:avLst>
-              <a:gd name="adj" fmla="val 10667"/>
-            </a:avLst>
-          </a:prstGeom>
-          <a:solidFill>
-            <a:srgbClr val="F1E05A"/>
-          </a:solidFill>
-          <a:ln w="12700">
-            <a:solidFill>
-              <a:srgbClr val="F1E05A"/>
-            </a:solidFill>
-            <a:prstDash val="solid"/>
-          </a:ln>
-        </p:spPr>
-        <p:txBody>
-          <a:bodyPr/>
-          <a:lstStyle/>
-          <a:p>
-            <a:endParaRPr lang="en-US"/>
-          </a:p>
-        </p:txBody>
-      </p:sp>
-      <p:sp>
-        <p:nvSpPr>
-          <p:cNvPr id="9" name="Text 6"/>
-          <p:cNvSpPr/>
-          <p:nvPr/>
-        </p:nvSpPr>
-        <p:spPr>
-          <a:xfrm>
-            <a:off x="859536" y="4727448"/>
-            <a:ext cx="969264" cy="100584"/>
-          </a:xfrm>
-          <a:prstGeom prst="rect">
-            <a:avLst/>
-          </a:prstGeom>
-          <a:noFill/>
-          <a:ln/>
-        </p:spPr>
-        <p:txBody>
-          <a:bodyPr wrap="square" lIns="0" tIns="0" rIns="0" bIns="0" rtlCol="0" anchor="ctr"/>
-          <a:lstStyle/>
-          <a:p>
-            <a:pPr marL="0" indent="0" algn="ctr">
-              <a:buNone/>
-            </a:pPr>
-            <a:r>
-              <a:rPr lang="en-US" sz="850" b="1" dirty="0"/>
-              <a:t>JS</a:t>
-            </a:r>
-            <a:endParaRPr lang="en-US" sz="850" dirty="0"/>
-          </a:p>
-        </p:txBody>
-      </p:sp>
-      <p:sp>
-        <p:nvSpPr>
-          <p:cNvPr id="10" name="Text 7"/>
-          <p:cNvSpPr/>
-          <p:nvPr/>
-        </p:nvSpPr>
-        <p:spPr>
-          <a:xfrm>
-            <a:off x="822960" y="4928616"/>
-            <a:ext cx="1042416" cy="164592"/>
-          </a:xfrm>
-          <a:prstGeom prst="rect">
-            <a:avLst/>
-          </a:prstGeom>
-          <a:noFill/>
-          <a:ln/>
-        </p:spPr>
-        <p:txBody>
-          <a:bodyPr wrap="square" lIns="0" tIns="0" rIns="0" bIns="0" rtlCol="0" anchor="ctr"/>
-          <a:lstStyle/>
-          <a:p>
-            <a:pPr marL="0" indent="0" algn="ctr">
-              <a:buNone/>
-            </a:pPr>
-            <a:r>
-              <a:rPr lang="en-US" sz="1350" b="1" dirty="0">
-                <a:solidFill>
-                  <a:srgbClr val="0F2233"/>
-                </a:solidFill>
-              </a:rPr>
-              <a:t>86.5%</a:t>
-            </a:r>
-            <a:endParaRPr lang="en-US" sz="1350" dirty="0"/>
-          </a:p>
-        </p:txBody>
-      </p:sp>
-      <p:sp>
-        <p:nvSpPr>
-          <p:cNvPr id="11" name="Shape 8"/>
-          <p:cNvSpPr/>
-          <p:nvPr/>
-        </p:nvSpPr>
-        <p:spPr>
-          <a:xfrm>
-            <a:off x="2075688" y="4663440"/>
-            <a:ext cx="1188720" cy="685800"/>
-          </a:xfrm>
-          <a:prstGeom prst="roundRect">
-            <a:avLst>
-              <a:gd name="adj" fmla="val 10667"/>
-            </a:avLst>
-          </a:prstGeom>
-          <a:solidFill>
-            <a:srgbClr val="1470DD"/>
-          </a:solidFill>
-          <a:ln w="12700">
-            <a:solidFill>
-              <a:srgbClr val="1470DD"/>
-            </a:solidFill>
-            <a:prstDash val="solid"/>
-          </a:ln>
-        </p:spPr>
-        <p:txBody>
-          <a:bodyPr/>
-          <a:lstStyle/>
-          <a:p>
-            <a:endParaRPr lang="en-US" dirty="0"/>
-          </a:p>
-        </p:txBody>
-      </p:sp>
-      <p:sp>
-        <p:nvSpPr>
-          <p:cNvPr id="12" name="Text 9"/>
-          <p:cNvSpPr/>
-          <p:nvPr/>
-        </p:nvSpPr>
-        <p:spPr>
-          <a:xfrm>
-            <a:off x="2185416" y="4727448"/>
-            <a:ext cx="969264" cy="100584"/>
-          </a:xfrm>
-          <a:prstGeom prst="rect">
-            <a:avLst/>
-          </a:prstGeom>
-          <a:noFill/>
-          <a:ln/>
-        </p:spPr>
-        <p:txBody>
-          <a:bodyPr wrap="square" lIns="0" tIns="0" rIns="0" bIns="0" rtlCol="0" anchor="ctr"/>
-          <a:lstStyle/>
-          <a:p>
-            <a:pPr marL="0" indent="0" algn="ctr">
-              <a:buNone/>
-            </a:pPr>
-            <a:r>
-              <a:rPr lang="en-US" sz="850" b="1" dirty="0">
-                <a:solidFill>
-                  <a:schemeClr val="bg1"/>
-                </a:solidFill>
-              </a:rPr>
-              <a:t>CSS</a:t>
-            </a:r>
-            <a:endParaRPr lang="en-US" sz="850" dirty="0">
-              <a:solidFill>
-                <a:schemeClr val="bg1"/>
-              </a:solidFill>
-            </a:endParaRPr>
-          </a:p>
-        </p:txBody>
-      </p:sp>
-      <p:sp>
-        <p:nvSpPr>
-          <p:cNvPr id="13" name="Text 10"/>
-          <p:cNvSpPr/>
-          <p:nvPr/>
-        </p:nvSpPr>
-        <p:spPr>
-          <a:xfrm>
-            <a:off x="2148840" y="4928616"/>
-            <a:ext cx="1042416" cy="164592"/>
-          </a:xfrm>
-          <a:prstGeom prst="rect">
-            <a:avLst/>
-          </a:prstGeom>
-          <a:noFill/>
-          <a:ln/>
-        </p:spPr>
-        <p:txBody>
-          <a:bodyPr wrap="square" lIns="0" tIns="0" rIns="0" bIns="0" rtlCol="0" anchor="ctr"/>
-          <a:lstStyle/>
-          <a:p>
-            <a:pPr marL="0" indent="0" algn="ctr">
-              <a:buNone/>
-            </a:pPr>
-            <a:r>
-              <a:rPr lang="en-US" sz="1350" b="1" dirty="0">
-                <a:solidFill>
-                  <a:srgbClr val="0F2233"/>
-                </a:solidFill>
-              </a:rPr>
-              <a:t>10.3%</a:t>
-            </a:r>
-            <a:endParaRPr lang="en-US" sz="1350" dirty="0"/>
-          </a:p>
-        </p:txBody>
-      </p:sp>
-      <p:sp>
-        <p:nvSpPr>
-          <p:cNvPr id="14" name="Shape 11"/>
-          <p:cNvSpPr/>
-          <p:nvPr/>
-        </p:nvSpPr>
-        <p:spPr>
-          <a:xfrm>
-            <a:off x="3401568" y="4663440"/>
-            <a:ext cx="1188720" cy="685800"/>
-          </a:xfrm>
-          <a:prstGeom prst="roundRect">
-            <a:avLst>
-              <a:gd name="adj" fmla="val 10667"/>
-            </a:avLst>
-          </a:prstGeom>
-          <a:solidFill>
-            <a:srgbClr val="E34C26"/>
-          </a:solidFill>
-          <a:ln w="12700">
-            <a:solidFill>
-              <a:srgbClr val="E34C26"/>
-            </a:solidFill>
-            <a:prstDash val="solid"/>
-          </a:ln>
-        </p:spPr>
-        <p:txBody>
-          <a:bodyPr/>
-          <a:lstStyle/>
-          <a:p>
-            <a:endParaRPr lang="en-US"/>
-          </a:p>
-        </p:txBody>
-      </p:sp>
-      <p:sp>
-        <p:nvSpPr>
-          <p:cNvPr id="15" name="Text 12"/>
-          <p:cNvSpPr/>
-          <p:nvPr/>
-        </p:nvSpPr>
-        <p:spPr>
-          <a:xfrm>
-            <a:off x="3511296" y="4727448"/>
-            <a:ext cx="969264" cy="100584"/>
-          </a:xfrm>
-          <a:prstGeom prst="rect">
-            <a:avLst/>
-          </a:prstGeom>
-          <a:noFill/>
-          <a:ln/>
-        </p:spPr>
-        <p:txBody>
-          <a:bodyPr wrap="square" lIns="0" tIns="0" rIns="0" bIns="0" rtlCol="0" anchor="ctr"/>
-          <a:lstStyle/>
-          <a:p>
-            <a:pPr marL="0" indent="0" algn="ctr">
-              <a:buNone/>
-            </a:pPr>
-            <a:r>
-              <a:rPr lang="en-US" sz="850" b="1" dirty="0">
-                <a:solidFill>
-                  <a:schemeClr val="bg1"/>
-                </a:solidFill>
-              </a:rPr>
-              <a:t>HTML</a:t>
-            </a:r>
-            <a:endParaRPr lang="en-US" sz="850" dirty="0">
-              <a:solidFill>
-                <a:schemeClr val="bg1"/>
-              </a:solidFill>
-            </a:endParaRPr>
-          </a:p>
-        </p:txBody>
-      </p:sp>
-      <p:sp>
-        <p:nvSpPr>
-          <p:cNvPr id="16" name="Text 13"/>
-          <p:cNvSpPr/>
-          <p:nvPr/>
-        </p:nvSpPr>
-        <p:spPr>
-          <a:xfrm>
-            <a:off x="3474720" y="4928616"/>
-            <a:ext cx="1042416" cy="164592"/>
-          </a:xfrm>
-          <a:prstGeom prst="rect">
-            <a:avLst/>
-          </a:prstGeom>
-          <a:noFill/>
-          <a:ln/>
-        </p:spPr>
-        <p:txBody>
-          <a:bodyPr wrap="square" lIns="0" tIns="0" rIns="0" bIns="0" rtlCol="0" anchor="ctr"/>
-          <a:lstStyle/>
-          <a:p>
-            <a:pPr marL="0" indent="0" algn="ctr">
-              <a:buNone/>
-            </a:pPr>
-            <a:r>
-              <a:rPr lang="en-US" sz="1350" b="1" dirty="0">
-                <a:solidFill>
-                  <a:srgbClr val="0F2233"/>
-                </a:solidFill>
-              </a:rPr>
-              <a:t>3.2%</a:t>
-            </a:r>
-            <a:endParaRPr lang="en-US" sz="1350" dirty="0"/>
           </a:p>
         </p:txBody>
       </p:sp>
@@ -7075,7 +7774,7 @@
           </a:prstGeom>
           <a:extLst>
             <a:ext uri="{C572A759-6A51-4108-AA02-DFA0A04FC94B}">
-              <ma14:wrappingTextBoxFlag xmlns:ma14="http://schemas.microsoft.com/office/mac/drawingml/2011/main" xmlns="" val="0"/>
+              <ma14:wrappingTextBoxFlag xmlns="" xmlns:ma14="http://schemas.microsoft.com/office/mac/drawingml/2011/main" val="0"/>
             </a:ext>
           </a:extLst>
         </p:spPr>
@@ -7097,6 +7796,109 @@
               <a:t>6</a:t>
             </a:fld>
             <a:endParaRPr lang="en-US"/>
+          </a:p>
+        </p:txBody>
+      </p:sp>
+      <p:graphicFrame>
+        <p:nvGraphicFramePr>
+          <p:cNvPr id="18" name="Chart 17">
+            <a:extLst>
+              <a:ext uri="{FF2B5EF4-FFF2-40B4-BE49-F238E27FC236}">
+                <a16:creationId xmlns:a16="http://schemas.microsoft.com/office/drawing/2014/main" id="{0BAF693D-D29E-79DB-47D0-5ACCC1D1CEAC}"/>
+              </a:ext>
+            </a:extLst>
+          </p:cNvPr>
+          <p:cNvGraphicFramePr/>
+          <p:nvPr>
+            <p:extLst>
+              <p:ext uri="{D42A27DB-BD31-4B8C-83A1-F6EECF244321}">
+                <p14:modId xmlns:p14="http://schemas.microsoft.com/office/powerpoint/2010/main" val="506843705"/>
+              </p:ext>
+            </p:extLst>
+          </p:nvPr>
+        </p:nvGraphicFramePr>
+        <p:xfrm>
+          <a:off x="6582987" y="3356752"/>
+          <a:ext cx="4232009" cy="2397041"/>
+        </p:xfrm>
+        <a:graphic>
+          <a:graphicData uri="http://schemas.openxmlformats.org/drawingml/2006/chart">
+            <c:chart xmlns:c="http://schemas.openxmlformats.org/drawingml/2006/chart" xmlns:r="http://schemas.openxmlformats.org/officeDocument/2006/relationships" r:id="rId4"/>
+          </a:graphicData>
+        </a:graphic>
+      </p:graphicFrame>
+      <p:cxnSp>
+        <p:nvCxnSpPr>
+          <p:cNvPr id="20" name="Straight Connector 19">
+            <a:extLst>
+              <a:ext uri="{FF2B5EF4-FFF2-40B4-BE49-F238E27FC236}">
+                <a16:creationId xmlns:a16="http://schemas.microsoft.com/office/drawing/2014/main" id="{54E9C65D-8A86-623E-34B9-F45D32849A85}"/>
+              </a:ext>
+            </a:extLst>
+          </p:cNvPr>
+          <p:cNvCxnSpPr>
+            <a:cxnSpLocks/>
+          </p:cNvCxnSpPr>
+          <p:nvPr/>
+        </p:nvCxnSpPr>
+        <p:spPr>
+          <a:xfrm>
+            <a:off x="0" y="915047"/>
+            <a:ext cx="4553527" cy="0"/>
+          </a:xfrm>
+          <a:prstGeom prst="line">
+            <a:avLst/>
+          </a:prstGeom>
+          <a:ln w="76200"/>
+        </p:spPr>
+        <p:style>
+          <a:lnRef idx="1">
+            <a:schemeClr val="dk1"/>
+          </a:lnRef>
+          <a:fillRef idx="0">
+            <a:schemeClr val="dk1"/>
+          </a:fillRef>
+          <a:effectRef idx="0">
+            <a:schemeClr val="dk1"/>
+          </a:effectRef>
+          <a:fontRef idx="minor">
+            <a:schemeClr val="tx1"/>
+          </a:fontRef>
+        </p:style>
+      </p:cxnSp>
+      <p:sp>
+        <p:nvSpPr>
+          <p:cNvPr id="5" name="Text 2"/>
+          <p:cNvSpPr/>
+          <p:nvPr/>
+        </p:nvSpPr>
+        <p:spPr>
+          <a:xfrm>
+            <a:off x="749808" y="2925432"/>
+            <a:ext cx="1280160" cy="182880"/>
+          </a:xfrm>
+          <a:prstGeom prst="rect">
+            <a:avLst/>
+          </a:prstGeom>
+          <a:noFill/>
+          <a:ln/>
+        </p:spPr>
+        <p:txBody>
+          <a:bodyPr wrap="square" lIns="0" tIns="0" rIns="0" bIns="0" rtlCol="0" anchor="ctr"/>
+          <a:lstStyle/>
+          <a:p>
+            <a:pPr marL="0" indent="0">
+              <a:buNone/>
+            </a:pPr>
+            <a:r>
+              <a:rPr lang="en-US" sz="2000" b="1" dirty="0">
+                <a:solidFill>
+                  <a:srgbClr val="0F2233"/>
+                </a:solidFill>
+              </a:rPr>
+              <a:t>Main files:</a:t>
+            </a:r>
+            <a:endParaRPr lang="en-US" sz="2000" dirty="0"/>
           </a:p>
         </p:txBody>
       </p:sp>
@@ -7145,7 +7947,7 @@
           </a:prstGeom>
           <a:extLst>
             <a:ext uri="{C572A759-6A51-4108-AA02-DFA0A04FC94B}">
-              <ma14:wrappingTextBoxFlag xmlns:ma14="http://schemas.microsoft.com/office/mac/drawingml/2011/main" xmlns="" val="0"/>
+              <ma14:wrappingTextBoxFlag xmlns="" xmlns:ma14="http://schemas.microsoft.com/office/mac/drawingml/2011/main" val="0"/>
             </a:ext>
           </a:extLst>
         </p:spPr>
@@ -7546,6 +8348,58 @@
       </p:grpSpPr>
       <p:sp>
         <p:nvSpPr>
+          <p:cNvPr id="4" name="Rectangle 3">
+            <a:extLst>
+              <a:ext uri="{FF2B5EF4-FFF2-40B4-BE49-F238E27FC236}">
+                <a16:creationId xmlns:a16="http://schemas.microsoft.com/office/drawing/2014/main" id="{E14DB9AA-9358-FA6B-9F10-4E4872821C65}"/>
+              </a:ext>
+            </a:extLst>
+          </p:cNvPr>
+          <p:cNvSpPr/>
+          <p:nvPr/>
+        </p:nvSpPr>
+        <p:spPr>
+          <a:xfrm>
+            <a:off x="-1" y="320040"/>
+            <a:ext cx="4785643" cy="1560945"/>
+          </a:xfrm>
+          <a:prstGeom prst="rect">
+            <a:avLst/>
+          </a:prstGeom>
+          <a:solidFill>
+            <a:srgbClr val="F7FAFC"/>
+          </a:solidFill>
+          <a:ln>
+            <a:noFill/>
+          </a:ln>
+        </p:spPr>
+        <p:style>
+          <a:lnRef idx="2">
+            <a:schemeClr val="accent1">
+              <a:shade val="15000"/>
+            </a:schemeClr>
+          </a:lnRef>
+          <a:fillRef idx="1">
+            <a:schemeClr val="accent1"/>
+          </a:fillRef>
+          <a:effectRef idx="0">
+            <a:schemeClr val="accent1"/>
+          </a:effectRef>
+          <a:fontRef idx="minor">
+            <a:schemeClr val="lt1"/>
+          </a:fontRef>
+        </p:style>
+        <p:txBody>
+          <a:bodyPr rtlCol="0" anchor="ctr"/>
+          <a:lstStyle/>
+          <a:p>
+            <a:pPr algn="ctr"/>
+            <a:endParaRPr lang="en-US"/>
+          </a:p>
+        </p:txBody>
+      </p:sp>
+      <p:sp>
+        <p:nvSpPr>
           <p:cNvPr id="2" name="Shape 11">
             <a:extLst>
               <a:ext uri="{FF2B5EF4-FFF2-40B4-BE49-F238E27FC236}">
@@ -7617,7 +8471,7 @@
           </a:prstGeom>
           <a:extLst>
             <a:ext uri="{C572A759-6A51-4108-AA02-DFA0A04FC94B}">
-              <ma14:wrappingTextBoxFlag xmlns:ma14="http://schemas.microsoft.com/office/mac/drawingml/2011/main" xmlns="" val="0"/>
+              <ma14:wrappingTextBoxFlag xmlns="" xmlns:ma14="http://schemas.microsoft.com/office/mac/drawingml/2011/main" val="0"/>
             </a:ext>
           </a:extLst>
         </p:spPr>

--- a/Cipher_Breach_Presentation.pptx
+++ b/Cipher_Breach_Presentation.pptx
@@ -112,6 +112,38 @@
     </a:lvl9pPr>
   </p:defaultTextStyle>
   <p:extLst>
+    <p:ext uri="{521415D9-36F7-43E2-AB2F-B90AF26B5E84}">
+      <p14:sectionLst xmlns:p14="http://schemas.microsoft.com/office/powerpoint/2010/main">
+        <p14:section name="3bed" id="{630ED6EC-C44B-44B1-9DA6-D3E827C977F8}">
+          <p14:sldIdLst>
+            <p14:sldId id="263"/>
+            <p14:sldId id="256"/>
+          </p14:sldIdLst>
+        </p14:section>
+        <p14:section name="bashar" id="{551F1D4E-9040-4B05-B9FB-06693862D613}">
+          <p14:sldIdLst>
+            <p14:sldId id="257"/>
+          </p14:sldIdLst>
+        </p14:section>
+        <p14:section name="Ayed" id="{81E4E44E-A738-4200-BDF9-6A49B71097BD}">
+          <p14:sldIdLst>
+            <p14:sldId id="258"/>
+          </p14:sldIdLst>
+        </p14:section>
+        <p14:section name="abdul" id="{3F0D76FE-DC21-4ED0-8678-76A182E33E27}">
+          <p14:sldIdLst>
+            <p14:sldId id="259"/>
+          </p14:sldIdLst>
+        </p14:section>
+        <p14:section name="Ahmed" id="{8E284288-3DB3-43FD-B6F3-EC8E055E80F1}">
+          <p14:sldIdLst>
+            <p14:sldId id="260"/>
+            <p14:sldId id="261"/>
+            <p14:sldId id="264"/>
+          </p14:sldIdLst>
+        </p14:section>
+      </p14:sectionLst>
+    </p:ext>
     <p:ext uri="{EFAFB233-063F-42B5-8137-9DF3F51BA10A}">
       <p15:sldGuideLst xmlns:p15="http://schemas.microsoft.com/office/powerpoint/2012/main">
         <p15:guide id="1" orient="horz" pos="2160" userDrawn="1">
@@ -269,6 +301,11 @@
                 </a:contourClr>
               </a:sp3d>
             </c:spPr>
+            <c:extLst>
+              <c:ext xmlns:c16="http://schemas.microsoft.com/office/drawing/2014/chart" uri="{C3380CC4-5D6E-409C-BE32-E72D297353CC}">
+                <c16:uniqueId val="{00000007-EE00-458C-8D2E-982CD3A65A8F}"/>
+              </c:ext>
+            </c:extLst>
           </c:dPt>
           <c:dLbls>
             <c:dLbl>
@@ -2202,7 +2239,7 @@
           </a:prstGeom>
           <a:extLst>
             <a:ext uri="{C572A759-6A51-4108-AA02-DFA0A04FC94B}">
-              <ma14:wrappingTextBoxFlag xmlns="" xmlns:ma14="http://schemas.microsoft.com/office/mac/drawingml/2011/main" val="0"/>
+              <ma14:wrappingTextBoxFlag xmlns:ma14="http://schemas.microsoft.com/office/mac/drawingml/2011/main" xmlns="" val="0"/>
             </a:ext>
           </a:extLst>
         </p:spPr>
@@ -2277,7 +2314,7 @@
           </a:prstGeom>
           <a:extLst>
             <a:ext uri="{C572A759-6A51-4108-AA02-DFA0A04FC94B}">
-              <ma14:wrappingTextBoxFlag xmlns="" xmlns:ma14="http://schemas.microsoft.com/office/mac/drawingml/2011/main" val="0"/>
+              <ma14:wrappingTextBoxFlag xmlns:ma14="http://schemas.microsoft.com/office/mac/drawingml/2011/main" xmlns="" val="0"/>
             </a:ext>
           </a:extLst>
         </p:spPr>
@@ -2651,7 +2688,7 @@
           </a:prstGeom>
           <a:extLst>
             <a:ext uri="{C572A759-6A51-4108-AA02-DFA0A04FC94B}">
-              <ma14:wrappingTextBoxFlag xmlns="" xmlns:ma14="http://schemas.microsoft.com/office/mac/drawingml/2011/main" val="0"/>
+              <ma14:wrappingTextBoxFlag xmlns:ma14="http://schemas.microsoft.com/office/mac/drawingml/2011/main" xmlns="" val="0"/>
             </a:ext>
           </a:extLst>
         </p:spPr>
@@ -4388,7 +4425,7 @@
           </a:prstGeom>
           <a:extLst>
             <a:ext uri="{C572A759-6A51-4108-AA02-DFA0A04FC94B}">
-              <ma14:wrappingTextBoxFlag xmlns="" xmlns:ma14="http://schemas.microsoft.com/office/mac/drawingml/2011/main" val="0"/>
+              <ma14:wrappingTextBoxFlag xmlns:ma14="http://schemas.microsoft.com/office/mac/drawingml/2011/main" xmlns="" val="0"/>
             </a:ext>
           </a:extLst>
         </p:spPr>
@@ -5028,7 +5065,7 @@
           </a:prstGeom>
           <a:extLst>
             <a:ext uri="{C572A759-6A51-4108-AA02-DFA0A04FC94B}">
-              <ma14:wrappingTextBoxFlag xmlns="" xmlns:ma14="http://schemas.microsoft.com/office/mac/drawingml/2011/main" val="0"/>
+              <ma14:wrappingTextBoxFlag xmlns:ma14="http://schemas.microsoft.com/office/mac/drawingml/2011/main" xmlns="" val="0"/>
             </a:ext>
           </a:extLst>
         </p:spPr>
@@ -5337,7 +5374,7 @@
         <p:spPr>
           <a:xfrm>
             <a:off x="1371600" y="1499616"/>
-            <a:ext cx="2240280" cy="109728"/>
+            <a:ext cx="1414732" cy="73152"/>
           </a:xfrm>
           <a:prstGeom prst="rect">
             <a:avLst/>
@@ -6526,7 +6563,7 @@
           </a:prstGeom>
           <a:extLst>
             <a:ext uri="{C572A759-6A51-4108-AA02-DFA0A04FC94B}">
-              <ma14:wrappingTextBoxFlag xmlns="" xmlns:ma14="http://schemas.microsoft.com/office/mac/drawingml/2011/main" val="0"/>
+              <ma14:wrappingTextBoxFlag xmlns:ma14="http://schemas.microsoft.com/office/mac/drawingml/2011/main" xmlns="" val="0"/>
             </a:ext>
           </a:extLst>
         </p:spPr>
@@ -7509,7 +7546,7 @@
           </a:prstGeom>
           <a:extLst>
             <a:ext uri="{C572A759-6A51-4108-AA02-DFA0A04FC94B}">
-              <ma14:wrappingTextBoxFlag xmlns="" xmlns:ma14="http://schemas.microsoft.com/office/mac/drawingml/2011/main" val="0"/>
+              <ma14:wrappingTextBoxFlag xmlns:ma14="http://schemas.microsoft.com/office/mac/drawingml/2011/main" xmlns="" val="0"/>
             </a:ext>
           </a:extLst>
         </p:spPr>
@@ -7774,7 +7811,7 @@
           </a:prstGeom>
           <a:extLst>
             <a:ext uri="{C572A759-6A51-4108-AA02-DFA0A04FC94B}">
-              <ma14:wrappingTextBoxFlag xmlns="" xmlns:ma14="http://schemas.microsoft.com/office/mac/drawingml/2011/main" val="0"/>
+              <ma14:wrappingTextBoxFlag xmlns:ma14="http://schemas.microsoft.com/office/mac/drawingml/2011/main" xmlns="" val="0"/>
             </a:ext>
           </a:extLst>
         </p:spPr>
@@ -7947,7 +7984,7 @@
           </a:prstGeom>
           <a:extLst>
             <a:ext uri="{C572A759-6A51-4108-AA02-DFA0A04FC94B}">
-              <ma14:wrappingTextBoxFlag xmlns="" xmlns:ma14="http://schemas.microsoft.com/office/mac/drawingml/2011/main" val="0"/>
+              <ma14:wrappingTextBoxFlag xmlns:ma14="http://schemas.microsoft.com/office/mac/drawingml/2011/main" xmlns="" val="0"/>
             </a:ext>
           </a:extLst>
         </p:spPr>
@@ -8471,7 +8508,7 @@
           </a:prstGeom>
           <a:extLst>
             <a:ext uri="{C572A759-6A51-4108-AA02-DFA0A04FC94B}">
-              <ma14:wrappingTextBoxFlag xmlns="" xmlns:ma14="http://schemas.microsoft.com/office/mac/drawingml/2011/main" val="0"/>
+              <ma14:wrappingTextBoxFlag xmlns:ma14="http://schemas.microsoft.com/office/mac/drawingml/2011/main" xmlns="" val="0"/>
             </a:ext>
           </a:extLst>
         </p:spPr>
@@ -8510,7 +8547,7 @@
         </p:nvSpPr>
         <p:spPr>
           <a:xfrm>
-            <a:off x="5063891" y="1258864"/>
+            <a:off x="5063890" y="1285067"/>
             <a:ext cx="2064218" cy="1003434"/>
           </a:xfrm>
           <a:prstGeom prst="rect">
@@ -8534,30 +8571,6 @@
               </a:rPr>
               <a:t>Thank You.</a:t>
             </a:r>
-          </a:p>
-          <a:p>
-            <a:pPr marL="0" indent="0" algn="ctr">
-              <a:buNone/>
-            </a:pPr>
-            <a:endParaRPr lang="en-US" sz="2400" b="1" dirty="0">
-              <a:solidFill>
-                <a:srgbClr val="0E2230"/>
-              </a:solidFill>
-            </a:endParaRPr>
-          </a:p>
-          <a:p>
-            <a:pPr marL="0" indent="0" algn="ctr">
-              <a:buNone/>
-            </a:pPr>
-            <a:r>
-              <a:rPr lang="en-US" sz="2400" b="1" dirty="0">
-                <a:solidFill>
-                  <a:srgbClr val="0E2230"/>
-                </a:solidFill>
-              </a:rPr>
-              <a:t>Questions?</a:t>
-            </a:r>
-            <a:endParaRPr lang="en-US" sz="2400" dirty="0"/>
           </a:p>
         </p:txBody>
       </p:sp>
@@ -8583,7 +8596,7 @@
         </p:blipFill>
         <p:spPr>
           <a:xfrm>
-            <a:off x="4785643" y="2709223"/>
+            <a:off x="4785642" y="2457418"/>
             <a:ext cx="2620713" cy="2620713"/>
           </a:xfrm>
           <a:prstGeom prst="rect">
